--- a/chapter 21.pptx
+++ b/chapter 21.pptx
@@ -253,7 +253,7 @@
           <a:p>
             <a:fld id="{13928E3B-7122-43E6-B3BB-09448C56C96C}" type="datetimeFigureOut">
               <a:rPr lang="en-US" smtClean="0"/>
-              <a:t>25/07/14</a:t>
+              <a:t>25/07/25</a:t>
             </a:fld>
             <a:endParaRPr lang="en-US" dirty="0"/>
           </a:p>
@@ -431,7 +431,7 @@
           <a:p>
             <a:fld id="{B98C9CAF-43DF-44BF-8016-DC193E4E594B}" type="datetimeFigureOut">
               <a:rPr lang="en-US" smtClean="0"/>
-              <a:t>25/07/14</a:t>
+              <a:t>25/07/25</a:t>
             </a:fld>
             <a:endParaRPr lang="en-US" dirty="0"/>
           </a:p>
@@ -3458,7 +3458,7 @@
           <a:p>
             <a:r>
               <a:rPr lang="en-US" dirty="0"/>
-              <a:t>21.4 Contextual Factors</a:t>
+              <a:t>Contextual Factors</a:t>
             </a:r>
           </a:p>
         </p:txBody>
@@ -3625,7 +3625,7 @@
           <a:p>
             <a:r>
               <a:rPr lang="en-US" dirty="0"/>
-              <a:t>21.4 Contextual Factors</a:t>
+              <a:t>Contextual Factors</a:t>
             </a:r>
           </a:p>
         </p:txBody>
@@ -3795,7 +3795,7 @@
           <a:p>
             <a:r>
               <a:rPr lang="en-US" dirty="0"/>
-              <a:t>21.5 The Architecture Tradeoff Analysis Method</a:t>
+              <a:t>The Architecture Tradeoff Analysis Method</a:t>
             </a:r>
           </a:p>
         </p:txBody>
@@ -6572,7 +6572,35 @@
           <a:bodyPr/>
           <a:lstStyle/>
           <a:p>
-            <a:endParaRPr lang="en-US"/>
+            <a:r>
+              <a:rPr lang="en-US" dirty="0"/>
+              <a:t>If a system is important enough for you to explicitly design its architecture, then that architecture should be evaluated.</a:t>
+            </a:r>
+          </a:p>
+          <a:p>
+            <a:r>
+              <a:rPr lang="en-US" dirty="0"/>
+              <a:t>The ATAM is a comprehensive method for evaluating software architectures. </a:t>
+            </a:r>
+          </a:p>
+          <a:p>
+            <a:pPr lvl="1"/>
+            <a:r>
+              <a:rPr lang="en-US" dirty="0"/>
+              <a:t>It works by having project decision makers and stakeholders articulate a precise list of quality attribute requirements and by illuminating the architectural decisions relevant to analyzing each high-priority scenario.</a:t>
+            </a:r>
+          </a:p>
+          <a:p>
+            <a:r>
+              <a:rPr lang="en-US" dirty="0"/>
+              <a:t>The decisions can then be understood in terms of risks or non-risks to find any trouble spots in the architecture.</a:t>
+            </a:r>
+          </a:p>
+          <a:p>
+            <a:r>
+              <a:rPr lang="en-US" dirty="0"/>
+              <a:t>Lightweight evaluations can be performed regularly as part of a project’s internal peer review activities. Lightweight Architecture Evaluation, based on the ATAM, provides an inexpensive, low-ceremony architecture evaluation that can be carried out in less than a day.</a:t>
+            </a:r>
           </a:p>
         </p:txBody>
       </p:sp>
@@ -6809,7 +6837,136 @@
           <a:bodyPr/>
           <a:lstStyle/>
           <a:p>
-            <a:endParaRPr lang="en-US" dirty="0"/>
+            <a:pPr>
+              <a:spcBef>
+                <a:spcPts val="1200"/>
+              </a:spcBef>
+            </a:pPr>
+            <a:r>
+              <a:rPr lang="en-US" dirty="0"/>
+              <a:t>Introduction</a:t>
+            </a:r>
+          </a:p>
+          <a:p>
+            <a:pPr>
+              <a:spcBef>
+                <a:spcPts val="1200"/>
+              </a:spcBef>
+            </a:pPr>
+            <a:r>
+              <a:rPr lang="en-US" dirty="0"/>
+              <a:t>Evaluation as a Risk Reduction Activity</a:t>
+            </a:r>
+          </a:p>
+          <a:p>
+            <a:pPr>
+              <a:spcBef>
+                <a:spcPts val="1200"/>
+              </a:spcBef>
+            </a:pPr>
+            <a:r>
+              <a:rPr lang="en-US" dirty="0"/>
+              <a:t>What Are the Key Evaluation Activities?</a:t>
+            </a:r>
+          </a:p>
+          <a:p>
+            <a:pPr>
+              <a:spcBef>
+                <a:spcPts val="1200"/>
+              </a:spcBef>
+            </a:pPr>
+            <a:r>
+              <a:rPr lang="en-US" dirty="0"/>
+              <a:t>Who Can Perform the Evaluation?</a:t>
+            </a:r>
+          </a:p>
+          <a:p>
+            <a:pPr>
+              <a:spcBef>
+                <a:spcPts val="1200"/>
+              </a:spcBef>
+            </a:pPr>
+            <a:r>
+              <a:rPr lang="en-US" dirty="0"/>
+              <a:t>Contextual Factors</a:t>
+            </a:r>
+          </a:p>
+          <a:p>
+            <a:pPr>
+              <a:spcBef>
+                <a:spcPts val="1200"/>
+              </a:spcBef>
+            </a:pPr>
+            <a:r>
+              <a:rPr lang="en-US" dirty="0"/>
+              <a:t>The Architecture Tradeoff Analysis Method</a:t>
+            </a:r>
+          </a:p>
+          <a:p>
+            <a:pPr lvl="1">
+              <a:spcBef>
+                <a:spcPts val="600"/>
+              </a:spcBef>
+            </a:pPr>
+            <a:r>
+              <a:rPr lang="en-US" dirty="0"/>
+              <a:t>Participants in the ATAM</a:t>
+            </a:r>
+          </a:p>
+          <a:p>
+            <a:pPr lvl="1">
+              <a:spcBef>
+                <a:spcPts val="600"/>
+              </a:spcBef>
+            </a:pPr>
+            <a:r>
+              <a:rPr lang="en-US" dirty="0"/>
+              <a:t>Outputs of the ATAM</a:t>
+            </a:r>
+          </a:p>
+          <a:p>
+            <a:pPr lvl="1">
+              <a:spcBef>
+                <a:spcPts val="600"/>
+              </a:spcBef>
+            </a:pPr>
+            <a:r>
+              <a:rPr lang="en-US" dirty="0"/>
+              <a:t>Phases of the ATAM</a:t>
+            </a:r>
+          </a:p>
+          <a:p>
+            <a:pPr lvl="1">
+              <a:spcBef>
+                <a:spcPts val="600"/>
+              </a:spcBef>
+            </a:pPr>
+            <a:r>
+              <a:rPr lang="en-US" dirty="0"/>
+              <a:t>Steps of the Evaluation Phases</a:t>
+            </a:r>
+          </a:p>
+          <a:p>
+            <a:pPr>
+              <a:spcBef>
+                <a:spcPts val="1200"/>
+              </a:spcBef>
+            </a:pPr>
+            <a:r>
+              <a:rPr lang="en-US" dirty="0"/>
+              <a:t>Lightweight Architecture Evaluation</a:t>
+            </a:r>
+          </a:p>
+          <a:p>
+            <a:pPr>
+              <a:spcBef>
+                <a:spcPts val="1200"/>
+              </a:spcBef>
+            </a:pPr>
+            <a:r>
+              <a:rPr lang="en-US" dirty="0"/>
+              <a:t>Summary</a:t>
+            </a:r>
           </a:p>
         </p:txBody>
       </p:sp>
@@ -7136,7 +7293,7 @@
           <a:p>
             <a:r>
               <a:rPr lang="en-US" dirty="0"/>
-              <a:t>21.1 Evaluation as a Risk Reduction Activity</a:t>
+              <a:t>Evaluation as a Risk Reduction Activity</a:t>
             </a:r>
           </a:p>
         </p:txBody>
@@ -7304,7 +7461,7 @@
           <a:p>
             <a:r>
               <a:rPr lang="en-US" dirty="0"/>
-              <a:t>21.2 What Are the Key Evaluation Activities?</a:t>
+              <a:t>What Are the Key Evaluation Activities?</a:t>
             </a:r>
           </a:p>
         </p:txBody>
@@ -7465,7 +7622,7 @@
           <a:p>
             <a:r>
               <a:rPr lang="en-US" dirty="0"/>
-              <a:t>21.3 Who Can Perform the Evaluation?</a:t>
+              <a:t>Who Can Perform the Evaluation?</a:t>
             </a:r>
           </a:p>
         </p:txBody>
@@ -7662,7 +7819,7 @@
           <a:p>
             <a:r>
               <a:rPr lang="en-US" dirty="0"/>
-              <a:t>21.3 Who Can Perform the Evaluation?</a:t>
+              <a:t>Who Can Perform the Evaluation?</a:t>
             </a:r>
           </a:p>
         </p:txBody>

--- a/chapter 21.pptx
+++ b/chapter 21.pptx
@@ -15,7 +15,7 @@
     <p:sldId id="264" r:id="rId3"/>
     <p:sldId id="268" r:id="rId4"/>
     <p:sldId id="266" r:id="rId5"/>
-    <p:sldId id="269" r:id="rId6"/>
+    <p:sldId id="296" r:id="rId6"/>
     <p:sldId id="270" r:id="rId7"/>
     <p:sldId id="271" r:id="rId8"/>
     <p:sldId id="272" r:id="rId9"/>
@@ -7058,12 +7058,43 @@
           <a:chExt cx="0" cy="0"/>
         </a:xfrm>
       </p:grpSpPr>
-      <p:sp>
-        <p:nvSpPr>
-          <p:cNvPr id="2" name="Content Placeholder 1">
-            <a:extLst>
-              <a:ext uri="{FF2B5EF4-FFF2-40B4-BE49-F238E27FC236}">
-                <a16:creationId xmlns:a16="http://schemas.microsoft.com/office/drawing/2014/main" id="{FE3ED8DE-7D44-DB8F-3ABF-1C40B58B2676}"/>
+      <p:pic>
+        <p:nvPicPr>
+          <p:cNvPr id="8" name="Picture Placeholder 7">
+            <a:extLst>
+              <a:ext uri="{FF2B5EF4-FFF2-40B4-BE49-F238E27FC236}">
+                <a16:creationId xmlns:a16="http://schemas.microsoft.com/office/drawing/2014/main" id="{20DA50CE-9646-BC28-0D60-DF8A999CE830}"/>
+              </a:ext>
+            </a:extLst>
+          </p:cNvPr>
+          <p:cNvPicPr>
+            <a:picLocks noGrp="1" noChangeAspect="1"/>
+          </p:cNvPicPr>
+          <p:nvPr>
+            <p:ph type="pic" sz="quarter" idx="11"/>
+          </p:nvPr>
+        </p:nvPicPr>
+        <p:blipFill>
+          <a:blip r:embed="rId2">
+            <a:extLst>
+              <a:ext uri="{28A0092B-C50C-407E-A947-70E740481C1C}">
+                <a14:useLocalDpi xmlns:a14="http://schemas.microsoft.com/office/drawing/2010/main" val="0"/>
+              </a:ext>
+            </a:extLst>
+          </a:blip>
+          <a:srcRect t="21386" b="21386"/>
+          <a:stretch>
+            <a:fillRect/>
+          </a:stretch>
+        </p:blipFill>
+        <p:spPr/>
+      </p:pic>
+      <p:sp>
+        <p:nvSpPr>
+          <p:cNvPr id="3" name="Content Placeholder 2">
+            <a:extLst>
+              <a:ext uri="{FF2B5EF4-FFF2-40B4-BE49-F238E27FC236}">
+                <a16:creationId xmlns:a16="http://schemas.microsoft.com/office/drawing/2014/main" id="{8E5CF416-1645-E76B-21B2-0CB72FC27D16}"/>
               </a:ext>
             </a:extLst>
           </p:cNvPr>
@@ -7099,6 +7130,31 @@
             </a:r>
           </a:p>
           <a:p>
+            <a:endParaRPr lang="en-US" dirty="0"/>
+          </a:p>
+        </p:txBody>
+      </p:sp>
+      <p:sp>
+        <p:nvSpPr>
+          <p:cNvPr id="4" name="Content Placeholder 3">
+            <a:extLst>
+              <a:ext uri="{FF2B5EF4-FFF2-40B4-BE49-F238E27FC236}">
+                <a16:creationId xmlns:a16="http://schemas.microsoft.com/office/drawing/2014/main" id="{1A45B118-C8DF-149A-F0A6-22FE6BB4F78E}"/>
+              </a:ext>
+            </a:extLst>
+          </p:cNvPr>
+          <p:cNvSpPr>
+            <a:spLocks noGrp="1"/>
+          </p:cNvSpPr>
+          <p:nvPr>
+            <p:ph sz="half" idx="12"/>
+          </p:nvPr>
+        </p:nvSpPr>
+        <p:spPr/>
+        <p:txBody>
+          <a:bodyPr/>
+          <a:lstStyle/>
+          <a:p>
             <a:r>
               <a:rPr lang="en-US" dirty="0"/>
               <a:t>Different evaluation techniques come with different costs.</a:t>
@@ -7110,14 +7166,17 @@
               <a:t>But the costs can be measured in terms of the time spent by the people involved in the preparation, execution, and follow-up of the evaluation activities.</a:t>
             </a:r>
           </a:p>
-        </p:txBody>
-      </p:sp>
-      <p:sp>
-        <p:nvSpPr>
-          <p:cNvPr id="3" name="Title 2">
-            <a:extLst>
-              <a:ext uri="{FF2B5EF4-FFF2-40B4-BE49-F238E27FC236}">
-                <a16:creationId xmlns:a16="http://schemas.microsoft.com/office/drawing/2014/main" id="{7F5EFD45-62C0-98DC-87BD-9CE9F70E9847}"/>
+          <a:p>
+            <a:endParaRPr lang="en-US" dirty="0"/>
+          </a:p>
+        </p:txBody>
+      </p:sp>
+      <p:sp>
+        <p:nvSpPr>
+          <p:cNvPr id="5" name="Title 4">
+            <a:extLst>
+              <a:ext uri="{FF2B5EF4-FFF2-40B4-BE49-F238E27FC236}">
+                <a16:creationId xmlns:a16="http://schemas.microsoft.com/office/drawing/2014/main" id="{D8CE61A8-45D1-EA5B-585C-365BF4CA4ABC}"/>
               </a:ext>
             </a:extLst>
           </p:cNvPr>
@@ -7142,18 +7201,18 @@
       </p:sp>
       <p:sp>
         <p:nvSpPr>
-          <p:cNvPr id="4" name="Slide Number Placeholder 3">
-            <a:extLst>
-              <a:ext uri="{FF2B5EF4-FFF2-40B4-BE49-F238E27FC236}">
-                <a16:creationId xmlns:a16="http://schemas.microsoft.com/office/drawing/2014/main" id="{9C7C8EE7-DF53-7020-F173-D19F79D75722}"/>
-              </a:ext>
-            </a:extLst>
-          </p:cNvPr>
-          <p:cNvSpPr>
-            <a:spLocks noGrp="1"/>
-          </p:cNvSpPr>
-          <p:nvPr>
-            <p:ph type="sldNum" sz="quarter" idx="10"/>
+          <p:cNvPr id="6" name="Slide Number Placeholder 5">
+            <a:extLst>
+              <a:ext uri="{FF2B5EF4-FFF2-40B4-BE49-F238E27FC236}">
+                <a16:creationId xmlns:a16="http://schemas.microsoft.com/office/drawing/2014/main" id="{31BFA16C-6F28-CB89-EF43-B11BA7898FAA}"/>
+              </a:ext>
+            </a:extLst>
+          </p:cNvPr>
+          <p:cNvSpPr>
+            <a:spLocks noGrp="1"/>
+          </p:cNvSpPr>
+          <p:nvPr>
+            <p:ph type="sldNum" sz="quarter" idx="13"/>
           </p:nvPr>
         </p:nvSpPr>
         <p:spPr/>
@@ -7173,7 +7232,7 @@
     </p:spTree>
     <p:extLst>
       <p:ext uri="{BB962C8B-B14F-4D97-AF65-F5344CB8AC3E}">
-        <p14:creationId xmlns:p14="http://schemas.microsoft.com/office/powerpoint/2010/main" val="2994014935"/>
+        <p14:creationId xmlns:p14="http://schemas.microsoft.com/office/powerpoint/2010/main" val="3625979053"/>
       </p:ext>
     </p:extLst>
   </p:cSld>

--- a/chapter 21.pptx
+++ b/chapter 21.pptx
@@ -5,10 +5,10 @@
     <p:sldMasterId id="2147483648" r:id="rId1"/>
   </p:sldMasterIdLst>
   <p:notesMasterIdLst>
-    <p:notesMasterId r:id="rId30"/>
+    <p:notesMasterId r:id="rId31"/>
   </p:notesMasterIdLst>
   <p:handoutMasterIdLst>
-    <p:handoutMasterId r:id="rId31"/>
+    <p:handoutMasterId r:id="rId32"/>
   </p:handoutMasterIdLst>
   <p:sldIdLst>
     <p:sldId id="259" r:id="rId2"/>
@@ -31,14 +31,15 @@
     <p:sldId id="285" r:id="rId19"/>
     <p:sldId id="286" r:id="rId20"/>
     <p:sldId id="287" r:id="rId21"/>
-    <p:sldId id="288" r:id="rId22"/>
-    <p:sldId id="289" r:id="rId23"/>
-    <p:sldId id="290" r:id="rId24"/>
-    <p:sldId id="291" r:id="rId25"/>
-    <p:sldId id="292" r:id="rId26"/>
-    <p:sldId id="293" r:id="rId27"/>
-    <p:sldId id="294" r:id="rId28"/>
-    <p:sldId id="295" r:id="rId29"/>
+    <p:sldId id="297" r:id="rId22"/>
+    <p:sldId id="288" r:id="rId23"/>
+    <p:sldId id="289" r:id="rId24"/>
+    <p:sldId id="290" r:id="rId25"/>
+    <p:sldId id="291" r:id="rId26"/>
+    <p:sldId id="292" r:id="rId27"/>
+    <p:sldId id="293" r:id="rId28"/>
+    <p:sldId id="294" r:id="rId29"/>
+    <p:sldId id="295" r:id="rId30"/>
   </p:sldIdLst>
   <p:sldSz cx="12192000" cy="6858000"/>
   <p:notesSz cx="6858000" cy="9144000"/>
@@ -253,7 +254,7 @@
           <a:p>
             <a:fld id="{13928E3B-7122-43E6-B3BB-09448C56C96C}" type="datetimeFigureOut">
               <a:rPr lang="en-US" smtClean="0"/>
-              <a:t>25/07/25</a:t>
+              <a:t>25/07/26</a:t>
             </a:fld>
             <a:endParaRPr lang="en-US" dirty="0"/>
           </a:p>
@@ -431,7 +432,7 @@
           <a:p>
             <a:fld id="{B98C9CAF-43DF-44BF-8016-DC193E4E594B}" type="datetimeFigureOut">
               <a:rPr lang="en-US" smtClean="0"/>
-              <a:t>25/07/25</a:t>
+              <a:t>25/07/26</a:t>
             </a:fld>
             <a:endParaRPr lang="en-US" dirty="0"/>
           </a:p>
@@ -3725,7 +3726,13 @@
             </a:r>
             <a:r>
               <a:rPr lang="en-US" dirty="0"/>
-              <a:t>(</a:t>
+              <a:t>(ATAM) is the process we have formalized to perform architecture evaluations.</a:t>
+            </a:r>
+          </a:p>
+          <a:p>
+            <a:r>
+              <a:rPr lang="en-US" dirty="0"/>
+              <a:t>The </a:t>
             </a:r>
             <a:r>
               <a:rPr lang="en-US" dirty="0">
@@ -3737,25 +3744,7 @@
             </a:r>
             <a:r>
               <a:rPr lang="en-US" dirty="0"/>
-              <a:t>) is the process we have </a:t>
-            </a:r>
-            <a:r>
-              <a:rPr lang="en-US" dirty="0">
-                <a:solidFill>
-                  <a:schemeClr val="accent1"/>
-                </a:solidFill>
-              </a:rPr>
-              <a:t>formalized</a:t>
-            </a:r>
-            <a:r>
-              <a:rPr lang="en-US" dirty="0"/>
-              <a:t> to perform architecture evaluations.</a:t>
-            </a:r>
-          </a:p>
-          <a:p>
-            <a:r>
-              <a:rPr lang="en-US" dirty="0"/>
-              <a:t>The ATAM has been used for more than two decades to evaluate software architectures of large systems in domains ranging from automotive to financial to defense.</a:t>
+              <a:t> has been used for more than two decades to evaluate software architectures of large systems in domains ranging from automotive to financial to defense.</a:t>
             </a:r>
           </a:p>
           <a:p>
@@ -3992,7 +3981,7 @@
             <a:pPr lvl="1"/>
             <a:r>
               <a:rPr lang="en-US" dirty="0"/>
-              <a:t>The architect is always included—a cardinal rule of architecture evaluation is that the architect must willingly participate.</a:t>
+              <a:t>The architect is always included.</a:t>
             </a:r>
             <a:endParaRPr lang="en-US" dirty="0">
               <a:solidFill>
@@ -4128,15 +4117,8 @@
             <a:pPr lvl="1"/>
             <a:r>
               <a:rPr lang="en-US" dirty="0"/>
-              <a:t>Stakeholders have a vested interest in the architecture performing as advertised.</a:t>
-            </a:r>
-            <a:endParaRPr lang="en-US" dirty="0">
-              <a:solidFill>
-                <a:schemeClr val="accent4">
-                  <a:lumMod val="50000"/>
-                </a:schemeClr>
-              </a:solidFill>
-            </a:endParaRPr>
+              <a:t>Stakeholders care about the architecture because its success affects them, they want it to work as promised.</a:t>
+            </a:r>
           </a:p>
           <a:p>
             <a:pPr lvl="1"/>
@@ -4290,7 +4272,7 @@
             </a:r>
           </a:p>
           <a:p>
-            <a:pPr marL="228600" indent="-457200">
+            <a:pPr marL="525780" lvl="1" indent="-457200">
               <a:buFont typeface="+mj-lt"/>
               <a:buAutoNum type="arabicPeriod"/>
             </a:pPr>
@@ -4306,14 +4288,14 @@
             </a:r>
           </a:p>
           <a:p>
-            <a:pPr lvl="1"/>
-            <a:r>
-              <a:rPr lang="en-US" dirty="0"/>
-              <a:t>One requirement of the ATAM is that the architecture be presented in one hour or less.</a:t>
-            </a:r>
-          </a:p>
-          <a:p>
-            <a:pPr marL="228600" indent="-457200">
+            <a:pPr lvl="2"/>
+            <a:r>
+              <a:rPr lang="en-US" dirty="0"/>
+              <a:t>architecture should be presented in one hour or less.</a:t>
+            </a:r>
+          </a:p>
+          <a:p>
+            <a:pPr marL="525780" lvl="1" indent="-457200">
               <a:buFont typeface="+mj-lt"/>
               <a:buAutoNum type="arabicPeriod"/>
             </a:pPr>
@@ -4329,21 +4311,14 @@
             </a:r>
           </a:p>
           <a:p>
-            <a:pPr lvl="1"/>
-            <a:r>
-              <a:rPr lang="en-US" dirty="0"/>
-              <a:t>The business goals presented in the ATAM exercise are being seen by some of the assembled participants for the first time.</a:t>
-            </a:r>
-          </a:p>
-          <a:p>
-            <a:pPr lvl="1"/>
-            <a:r>
-              <a:rPr lang="en-US" dirty="0"/>
-              <a:t>This description of the business goals... becomes part of the project’s legacy.</a:t>
-            </a:r>
-          </a:p>
-          <a:p>
-            <a:pPr marL="228600" indent="-457200">
+            <a:pPr lvl="2"/>
+            <a:r>
+              <a:rPr lang="en-US" dirty="0"/>
+              <a:t>During the ATAM session, some people may be hearing the business goals for the first time.</a:t>
+            </a:r>
+          </a:p>
+          <a:p>
+            <a:pPr marL="525780" lvl="1" indent="-457200">
               <a:buFont typeface="+mj-lt"/>
               <a:buAutoNum type="arabicPeriod"/>
             </a:pPr>
@@ -4359,17 +4334,41 @@
             </a:r>
           </a:p>
           <a:p>
-            <a:pPr lvl="1"/>
-            <a:r>
-              <a:rPr lang="en-US" dirty="0"/>
-              <a:t>The ATAM uses prioritized quality attribute scenarios as the basis for evaluating the architecture.</a:t>
-            </a:r>
-          </a:p>
-          <a:p>
-            <a:pPr lvl="1"/>
-            <a:r>
-              <a:rPr lang="en-US" dirty="0"/>
-              <a:t>Those scenarios may already exist... but if not, they are generated by the participants.</a:t>
+            <a:pPr lvl="2"/>
+            <a:r>
+              <a:rPr lang="en-US" dirty="0"/>
+              <a:t>The ATAM uses </a:t>
+            </a:r>
+            <a:r>
+              <a:rPr lang="en-US" dirty="0">
+                <a:solidFill>
+                  <a:schemeClr val="accent1"/>
+                </a:solidFill>
+              </a:rPr>
+              <a:t>prioritized</a:t>
+            </a:r>
+            <a:r>
+              <a:rPr lang="en-US" dirty="0"/>
+              <a:t> quality attribute </a:t>
+            </a:r>
+            <a:r>
+              <a:rPr lang="en-US" dirty="0">
+                <a:solidFill>
+                  <a:schemeClr val="accent1"/>
+                </a:solidFill>
+              </a:rPr>
+              <a:t>scenarios</a:t>
+            </a:r>
+            <a:r>
+              <a:rPr lang="en-US" dirty="0"/>
+              <a:t> as the basis for evaluating the architecture.</a:t>
+            </a:r>
+          </a:p>
+          <a:p>
+            <a:pPr lvl="2"/>
+            <a:r>
+              <a:rPr lang="en-US" dirty="0"/>
+              <a:t>Those scenarios may already exist but if not, they are generated by the participants.</a:t>
             </a:r>
           </a:p>
         </p:txBody>
@@ -4483,7 +4482,7 @@
           <a:bodyPr/>
           <a:lstStyle/>
           <a:p>
-            <a:pPr marL="228600" indent="-457200">
+            <a:pPr marL="525780" lvl="1" indent="-457200">
               <a:buFont typeface="+mj-lt"/>
               <a:buAutoNum type="arabicPeriod" startAt="4"/>
             </a:pPr>
@@ -4499,14 +4498,14 @@
             </a:r>
           </a:p>
           <a:p>
-            <a:pPr lvl="1"/>
+            <a:pPr lvl="2"/>
             <a:r>
               <a:rPr lang="en-US" dirty="0"/>
               <a:t>An architectural risk is a decision that may lead to undesirable consequences.</a:t>
             </a:r>
           </a:p>
           <a:p>
-            <a:pPr lvl="1"/>
+            <a:pPr lvl="2"/>
             <a:r>
               <a:rPr lang="en-US" dirty="0"/>
               <a:t>The identified risks form the basis for an architectural risk mitigation plan.</a:t>
@@ -4520,7 +4519,7 @@
             </a:endParaRPr>
           </a:p>
           <a:p>
-            <a:pPr marL="228600" indent="-457200">
+            <a:pPr marL="525780" lvl="1" indent="-457200">
               <a:buFont typeface="+mj-lt"/>
               <a:buAutoNum type="arabicPeriod" startAt="4"/>
             </a:pPr>
@@ -4532,39 +4531,33 @@
                   </a:schemeClr>
                 </a:solidFill>
               </a:rPr>
-              <a:t>Set of Risk Themes</a:t>
-            </a:r>
-          </a:p>
-          <a:p>
-            <a:pPr lvl="1"/>
-            <a:r>
-              <a:rPr lang="en-US" dirty="0"/>
-              <a:t>The evaluation team examines the full set of discovered risks to look for overarching themes.</a:t>
-            </a:r>
-            <a:endParaRPr lang="en-US" dirty="0">
-              <a:solidFill>
-                <a:schemeClr val="accent4">
-                  <a:lumMod val="50000"/>
-                </a:schemeClr>
-              </a:solidFill>
-            </a:endParaRPr>
-          </a:p>
-          <a:p>
-            <a:pPr lvl="1"/>
-            <a:r>
-              <a:rPr lang="en-US" dirty="0"/>
-              <a:t>If left untreated, these risk themes will threaten the project’s business goals.</a:t>
-            </a:r>
-            <a:endParaRPr lang="en-US" dirty="0">
-              <a:solidFill>
-                <a:schemeClr val="accent4">
-                  <a:lumMod val="50000"/>
-                </a:schemeClr>
-              </a:solidFill>
-            </a:endParaRPr>
-          </a:p>
-          <a:p>
-            <a:pPr marL="228600" indent="-457200">
+              <a:t>Set of Risk Themes </a:t>
+            </a:r>
+            <a:r>
+              <a:rPr lang="en-US" dirty="0">
+                <a:solidFill>
+                  <a:schemeClr val="tx1"/>
+                </a:solidFill>
+              </a:rPr>
+              <a:t>(group of related risks)</a:t>
+            </a:r>
+          </a:p>
+          <a:p>
+            <a:pPr lvl="2"/>
+            <a:r>
+              <a:rPr lang="en-US" dirty="0"/>
+              <a:t>During an ATAM, the evaluation team reviews all the identified risks to find bigger patterns or common issues (called themes).</a:t>
+            </a:r>
+          </a:p>
+          <a:p>
+            <a:pPr lvl="2"/>
+            <a:r>
+              <a:rPr lang="en-US" dirty="0"/>
+              <a:t>If these themes are not addressed, they could seriously harm the project’s ability to meet its business goals.</a:t>
+            </a:r>
+          </a:p>
+          <a:p>
+            <a:pPr marL="525780" lvl="1" indent="-457200">
               <a:buFont typeface="+mj-lt"/>
               <a:buAutoNum type="arabicPeriod" startAt="4"/>
             </a:pPr>
@@ -4580,17 +4573,36 @@
             </a:r>
           </a:p>
           <a:p>
-            <a:pPr lvl="1"/>
-            <a:r>
-              <a:rPr lang="en-US" dirty="0"/>
-              <a:t>Architectural decisions can be interpreted in terms of the drivers that they support or hinder.</a:t>
-            </a:r>
-          </a:p>
-          <a:p>
-            <a:pPr lvl="1"/>
-            <a:r>
-              <a:rPr lang="en-US" dirty="0"/>
-              <a:t>They can serve as a statement of the rationales for those decisions.</a:t>
+            <a:pPr lvl="2"/>
+            <a:r>
+              <a:rPr lang="en-US" dirty="0"/>
+              <a:t>Architectural decisions are linked to the quality requirements they affect.</a:t>
+            </a:r>
+          </a:p>
+          <a:p>
+            <a:pPr lvl="2"/>
+            <a:r>
+              <a:rPr lang="en-US" dirty="0"/>
+              <a:t>For </a:t>
+            </a:r>
+            <a:r>
+              <a:rPr lang="en-US" dirty="0">
+                <a:solidFill>
+                  <a:schemeClr val="accent1"/>
+                </a:solidFill>
+              </a:rPr>
+              <a:t>each quality scenario</a:t>
+            </a:r>
+            <a:r>
+              <a:rPr lang="en-US" dirty="0"/>
+              <a:t>, the team identifies which decisions support or block it.</a:t>
+            </a:r>
+          </a:p>
+          <a:p>
+            <a:pPr lvl="2"/>
+            <a:r>
+              <a:rPr lang="en-US" dirty="0"/>
+              <a:t>These links help explain why certain design choices were made and show how they support the project's goals.</a:t>
             </a:r>
             <a:endParaRPr lang="en-US" dirty="0">
               <a:solidFill>
@@ -4711,7 +4723,7 @@
           <a:bodyPr/>
           <a:lstStyle/>
           <a:p>
-            <a:pPr marL="228600" indent="-457200">
+            <a:pPr marL="525780" lvl="1" indent="-457200">
               <a:buFont typeface="+mj-lt"/>
               <a:buAutoNum type="arabicPeriod" startAt="7"/>
             </a:pPr>
@@ -4727,14 +4739,14 @@
             </a:r>
           </a:p>
           <a:p>
-            <a:pPr lvl="1"/>
+            <a:pPr lvl="2"/>
             <a:r>
               <a:rPr lang="en-US" dirty="0"/>
               <a:t>Sensitivity points are architectural decisions that have a marked effect on a quality attribute response.</a:t>
             </a:r>
           </a:p>
           <a:p>
-            <a:pPr lvl="1"/>
+            <a:pPr lvl="2"/>
             <a:r>
               <a:rPr lang="en-US" dirty="0"/>
               <a:t>Tradeoffs occur when two or more quality attribute responses are sensitive to the same architectural decision, but one of them improves while the other degrades.</a:t>
@@ -5086,26 +5098,13 @@
           <a:p>
             <a:r>
               <a:rPr lang="en-US" dirty="0"/>
-              <a:t>Steps 1–6 are carried out in phase 1 with the evaluation team and the project’s decision makers—typically, the architecture team, project manager, and client.</a:t>
+              <a:t>Steps 1–6 are carried out in phase 1 with the evaluation team and the project’s decision makers; typically, the architecture team, project manager, and client.</a:t>
             </a:r>
           </a:p>
           <a:p>
             <a:r>
               <a:rPr lang="en-US" dirty="0"/>
               <a:t>In phase 2, with all stakeholders involved, steps 1–6 are summarized and steps 7–9 are carried out.</a:t>
-            </a:r>
-          </a:p>
-          <a:p>
-            <a:r>
-              <a:rPr lang="en-US" dirty="0"/>
-              <a:t>Step 1: Present the ATAM</a:t>
-            </a:r>
-          </a:p>
-          <a:p>
-            <a:pPr lvl="1"/>
-            <a:r>
-              <a:rPr lang="en-US" dirty="0"/>
-              <a:t>The evaluation leader presents the ATAM to explain the process, answer questions, and set expectations.</a:t>
             </a:r>
           </a:p>
         </p:txBody>
@@ -5306,21 +5305,71 @@
           <a:lstStyle/>
           <a:p>
             <a:r>
-              <a:rPr lang="en-US" dirty="0"/>
-              <a:t>Step 2: Present the Business Goals</a:t>
+              <a:rPr lang="en-US" dirty="0">
+                <a:solidFill>
+                  <a:schemeClr val="accent4">
+                    <a:lumMod val="50000"/>
+                  </a:schemeClr>
+                </a:solidFill>
+              </a:rPr>
+              <a:t>Step 1: </a:t>
+            </a:r>
+            <a:r>
+              <a:rPr lang="en-US" dirty="0"/>
+              <a:t>Present the ATAM</a:t>
             </a:r>
           </a:p>
           <a:p>
             <a:pPr lvl="1"/>
             <a:r>
               <a:rPr lang="en-US" dirty="0"/>
+              <a:t>The evaluation leader presents the ATAM to explain the process, answer questions, and set expectations.</a:t>
+            </a:r>
+            <a:endParaRPr lang="en-US" dirty="0">
+              <a:solidFill>
+                <a:schemeClr val="accent4">
+                  <a:lumMod val="50000"/>
+                </a:schemeClr>
+              </a:solidFill>
+            </a:endParaRPr>
+          </a:p>
+          <a:p>
+            <a:r>
+              <a:rPr lang="en-US" dirty="0">
+                <a:solidFill>
+                  <a:schemeClr val="accent4">
+                    <a:lumMod val="50000"/>
+                  </a:schemeClr>
+                </a:solidFill>
+              </a:rPr>
+              <a:t>Step 2: </a:t>
+            </a:r>
+            <a:r>
+              <a:rPr lang="en-US" dirty="0"/>
+              <a:t>Present the Business Goals</a:t>
+            </a:r>
+          </a:p>
+          <a:p>
+            <a:pPr lvl="1"/>
+            <a:r>
+              <a:rPr lang="en-US" dirty="0"/>
               <a:t>A project decision maker presents a system overview from a business perspective.</a:t>
             </a:r>
           </a:p>
           <a:p>
             <a:r>
-              <a:rPr lang="en-US" dirty="0"/>
-              <a:t>Step 3: Present the Architecture</a:t>
+              <a:rPr lang="en-US" dirty="0">
+                <a:solidFill>
+                  <a:schemeClr val="accent4">
+                    <a:lumMod val="50000"/>
+                  </a:schemeClr>
+                </a:solidFill>
+              </a:rPr>
+              <a:t>Step 3: </a:t>
+            </a:r>
+            <a:r>
+              <a:rPr lang="en-US" dirty="0"/>
+              <a:t>Present the Architecture</a:t>
             </a:r>
           </a:p>
           <a:p>
@@ -5330,41 +5379,6 @@
               <a:t>The lead architect presents the architecture at an appropriate level of detail based on time, documentation, and quality requirements.</a:t>
             </a:r>
           </a:p>
-          <a:p>
-            <a:r>
-              <a:rPr lang="en-US" dirty="0"/>
-              <a:t>Step 4: Identify the Architectural Approaches</a:t>
-            </a:r>
-          </a:p>
-          <a:p>
-            <a:pPr lvl="1"/>
-            <a:r>
-              <a:rPr lang="en-US" dirty="0"/>
-              <a:t>The ATAM focuses on analyzing an architecture by understanding its architectural approaches.</a:t>
-            </a:r>
-          </a:p>
-          <a:p>
-            <a:pPr lvl="1"/>
-            <a:r>
-              <a:rPr lang="en-US" b="1" dirty="0"/>
-              <a:t>Example: </a:t>
-            </a:r>
-            <a:r>
-              <a:rPr lang="en-US" i="1" dirty="0"/>
-              <a:t>A layered pattern tends to bring portability and maintainability, possibly at the expense of performance.</a:t>
-            </a:r>
-          </a:p>
-          <a:p>
-            <a:pPr lvl="1"/>
-            <a:r>
-              <a:rPr lang="en-US" b="1" dirty="0"/>
-              <a:t>Example: </a:t>
-            </a:r>
-            <a:r>
-              <a:rPr lang="en-US" i="1" dirty="0"/>
-              <a:t>A publish-subscribe pattern is scalable, while active redundancy promotes high availability.</a:t>
-            </a:r>
-          </a:p>
         </p:txBody>
       </p:sp>
       <p:sp>
@@ -5390,7 +5404,7 @@
           <a:p>
             <a:r>
               <a:rPr lang="en-US" dirty="0"/>
-              <a:t>Steps of the Evaluation Phases</a:t>
+              <a:t>Phase 1</a:t>
             </a:r>
           </a:p>
         </p:txBody>
@@ -5460,7 +5474,7 @@
           <p:cNvPr id="2" name="Content Placeholder 1">
             <a:extLst>
               <a:ext uri="{FF2B5EF4-FFF2-40B4-BE49-F238E27FC236}">
-                <a16:creationId xmlns:a16="http://schemas.microsoft.com/office/drawing/2014/main" id="{0AC834C3-5CF8-8E07-5F33-84BDB5E40F3A}"/>
+                <a16:creationId xmlns:a16="http://schemas.microsoft.com/office/drawing/2014/main" id="{BF6DBE47-077A-7D5A-D028-42118B7D1D11}"/>
               </a:ext>
             </a:extLst>
           </p:cNvPr>
@@ -5477,8 +5491,91 @@
           <a:lstStyle/>
           <a:p>
             <a:r>
-              <a:rPr lang="en-US" dirty="0"/>
-              <a:t>Step 5: Generate a Quality Attribute Utility Tree</a:t>
+              <a:rPr lang="en-US" dirty="0">
+                <a:solidFill>
+                  <a:schemeClr val="accent4">
+                    <a:lumMod val="50000"/>
+                  </a:schemeClr>
+                </a:solidFill>
+              </a:rPr>
+              <a:t>Step 4: </a:t>
+            </a:r>
+            <a:r>
+              <a:rPr lang="en-US" dirty="0"/>
+              <a:t>Identify the Architectural Approaches</a:t>
+            </a:r>
+          </a:p>
+          <a:p>
+            <a:pPr lvl="1"/>
+            <a:r>
+              <a:rPr lang="en-US" dirty="0"/>
+              <a:t>The team identifies the </a:t>
+            </a:r>
+            <a:r>
+              <a:rPr lang="en-US" dirty="0">
+                <a:solidFill>
+                  <a:schemeClr val="accent1"/>
+                </a:solidFill>
+              </a:rPr>
+              <a:t>architectural approaches</a:t>
+            </a:r>
+            <a:r>
+              <a:rPr lang="en-US" dirty="0"/>
+              <a:t> used, such as </a:t>
+            </a:r>
+            <a:r>
+              <a:rPr lang="en-US" dirty="0">
+                <a:solidFill>
+                  <a:schemeClr val="accent1"/>
+                </a:solidFill>
+              </a:rPr>
+              <a:t>patterns</a:t>
+            </a:r>
+            <a:r>
+              <a:rPr lang="en-US" dirty="0"/>
+              <a:t> and </a:t>
+            </a:r>
+            <a:r>
+              <a:rPr lang="en-US" dirty="0">
+                <a:solidFill>
+                  <a:schemeClr val="accent1"/>
+                </a:solidFill>
+              </a:rPr>
+              <a:t>tactics</a:t>
+            </a:r>
+            <a:r>
+              <a:rPr lang="en-US" dirty="0"/>
+              <a:t>, because these have known effects on quality attributes. For example:</a:t>
+            </a:r>
+          </a:p>
+          <a:p>
+            <a:pPr lvl="1"/>
+            <a:r>
+              <a:rPr lang="en-US" i="1" dirty="0"/>
+              <a:t>A layered pattern tends to bring portability and maintainability, possibly at the expense of performance.</a:t>
+            </a:r>
+          </a:p>
+          <a:p>
+            <a:pPr lvl="1"/>
+            <a:r>
+              <a:rPr lang="en-US" i="1" dirty="0"/>
+              <a:t>A publish-subscribe pattern is scalable, while active redundancy promotes high availability.</a:t>
+            </a:r>
+          </a:p>
+          <a:p>
+            <a:r>
+              <a:rPr lang="en-US" dirty="0">
+                <a:solidFill>
+                  <a:schemeClr val="accent4">
+                    <a:lumMod val="50000"/>
+                  </a:schemeClr>
+                </a:solidFill>
+              </a:rPr>
+              <a:t>Step 5: </a:t>
+            </a:r>
+            <a:r>
+              <a:rPr lang="en-US" dirty="0"/>
+              <a:t>Generate a Quality Attribute Utility Tree</a:t>
             </a:r>
             <a:endParaRPr lang="en-US" i="1" dirty="0"/>
           </a:p>
@@ -5486,53 +5583,58 @@
             <a:pPr lvl="1"/>
             <a:r>
               <a:rPr lang="en-US" dirty="0"/>
-              <a:t>The utility tree defines specific quality attribute requirements that the architects aim to support.</a:t>
-            </a:r>
-          </a:p>
-          <a:p>
-            <a:r>
-              <a:rPr lang="en-US" dirty="0"/>
-              <a:t>Step 6: Analyze the Architectural Approach</a:t>
-            </a:r>
+              <a:t>A quality attribute utility tree is created to clearly define important quality. General goals from earlier steps are turned into detailed </a:t>
+            </a:r>
+            <a:r>
+              <a:rPr lang="en-US" dirty="0">
+                <a:solidFill>
+                  <a:schemeClr val="accent1"/>
+                </a:solidFill>
+              </a:rPr>
+              <a:t>QA scenarios.</a:t>
+            </a:r>
+            <a:endParaRPr lang="en-US" dirty="0"/>
           </a:p>
           <a:p>
             <a:pPr lvl="1"/>
             <a:r>
               <a:rPr lang="en-US" dirty="0"/>
-              <a:t>The evaluation team examines the highest-ranked scenarios, asking the architect to explain how the architecture supports each one.</a:t>
+              <a:t>The architect and decision-makers build the tree together, rating each scenario by: </a:t>
+            </a:r>
+            <a:r>
+              <a:rPr lang="en-US" dirty="0">
+                <a:solidFill>
+                  <a:schemeClr val="accent1"/>
+                </a:solidFill>
+              </a:rPr>
+              <a:t>Technical risk </a:t>
+            </a:r>
+            <a:r>
+              <a:rPr lang="en-US" dirty="0"/>
+              <a:t>and </a:t>
+            </a:r>
+            <a:r>
+              <a:rPr lang="en-US" dirty="0">
+                <a:solidFill>
+                  <a:schemeClr val="accent1"/>
+                </a:solidFill>
+              </a:rPr>
+              <a:t>Business importance</a:t>
+            </a:r>
+            <a:r>
+              <a:rPr lang="en-US" dirty="0"/>
+              <a:t>.</a:t>
             </a:r>
           </a:p>
           <a:p>
             <a:pPr lvl="1"/>
             <a:r>
               <a:rPr lang="en-US" dirty="0"/>
-              <a:t>The team documents relevant architectural decisions and identifies their risks, non-risks, and tradeoffs.</a:t>
-            </a:r>
-          </a:p>
-          <a:p>
-            <a:pPr lvl="1"/>
-            <a:r>
-              <a:rPr lang="en-US" b="1" dirty="0"/>
-              <a:t>Example</a:t>
-            </a:r>
-            <a:r>
-              <a:rPr lang="en-US" dirty="0"/>
-              <a:t>: The frequency of heartbeats affects failure detection time—high frequency improves availability but increases processing and bandwidth use. This is a tradeoff.</a:t>
-            </a:r>
-          </a:p>
-          <a:p>
-            <a:pPr lvl="1"/>
-            <a:r>
-              <a:rPr lang="en-US" dirty="0"/>
-              <a:t>At the end of step 6, the team should have a clear picture of the architecture’s key aspects, rationale for decisions, and a list of risks, non-risks, sensitivity points, and tradeoffs.</a:t>
-            </a:r>
-          </a:p>
-          <a:p>
-            <a:pPr lvl="1"/>
-            <a:r>
-              <a:rPr lang="en-US" dirty="0"/>
-              <a:t>Phase 1 concludes at this point.</a:t>
-            </a:r>
+              <a:t>This helps focus the evaluation on what matters most.</a:t>
+            </a:r>
+          </a:p>
+          <a:p>
+            <a:endParaRPr lang="en-US" dirty="0"/>
           </a:p>
         </p:txBody>
       </p:sp>
@@ -5541,7 +5643,7 @@
           <p:cNvPr id="3" name="Title 2">
             <a:extLst>
               <a:ext uri="{FF2B5EF4-FFF2-40B4-BE49-F238E27FC236}">
-                <a16:creationId xmlns:a16="http://schemas.microsoft.com/office/drawing/2014/main" id="{E1198459-2A16-24FD-0768-E5E04FFB90BC}"/>
+                <a16:creationId xmlns:a16="http://schemas.microsoft.com/office/drawing/2014/main" id="{21C7F5A9-5262-5CC2-CD68-43DC35E6A744}"/>
               </a:ext>
             </a:extLst>
           </p:cNvPr>
@@ -5559,7 +5661,7 @@
           <a:p>
             <a:r>
               <a:rPr lang="en-US" dirty="0"/>
-              <a:t>Steps of the Evaluation Phases</a:t>
+              <a:t>Phase 1</a:t>
             </a:r>
           </a:p>
         </p:txBody>
@@ -5569,7 +5671,7 @@
           <p:cNvPr id="4" name="Slide Number Placeholder 3">
             <a:extLst>
               <a:ext uri="{FF2B5EF4-FFF2-40B4-BE49-F238E27FC236}">
-                <a16:creationId xmlns:a16="http://schemas.microsoft.com/office/drawing/2014/main" id="{FB2E0131-F5DF-5DA9-60CA-A362D0B90E1D}"/>
+                <a16:creationId xmlns:a16="http://schemas.microsoft.com/office/drawing/2014/main" id="{F71636B6-6878-565F-4B96-D2236AF7B2F8}"/>
               </a:ext>
             </a:extLst>
           </p:cNvPr>
@@ -5597,7 +5699,7 @@
     </p:spTree>
     <p:extLst>
       <p:ext uri="{BB962C8B-B14F-4D97-AF65-F5344CB8AC3E}">
-        <p14:creationId xmlns:p14="http://schemas.microsoft.com/office/powerpoint/2010/main" val="2518216704"/>
+        <p14:creationId xmlns:p14="http://schemas.microsoft.com/office/powerpoint/2010/main" val="3031124230"/>
       </p:ext>
     </p:extLst>
   </p:cSld>
@@ -5629,7 +5731,7 @@
           <p:cNvPr id="2" name="Content Placeholder 1">
             <a:extLst>
               <a:ext uri="{FF2B5EF4-FFF2-40B4-BE49-F238E27FC236}">
-                <a16:creationId xmlns:a16="http://schemas.microsoft.com/office/drawing/2014/main" id="{2E2961C7-88C5-C27E-000D-32384B5D5C52}"/>
+                <a16:creationId xmlns:a16="http://schemas.microsoft.com/office/drawing/2014/main" id="{0AC834C3-5CF8-8E07-5F33-84BDB5E40F3A}"/>
               </a:ext>
             </a:extLst>
           </p:cNvPr>
@@ -5646,26 +5748,55 @@
           <a:lstStyle/>
           <a:p>
             <a:r>
-              <a:rPr lang="en-US" dirty="0"/>
-              <a:t>After Phase 1, there is a hiatus of about a week to summarize findings and clarify open questions.</a:t>
-            </a:r>
-          </a:p>
-          <a:p>
-            <a:r>
-              <a:rPr lang="en-US" dirty="0"/>
-              <a:t>Phase 1 is like testing your own code; Phase 2 is like giving it to QA for more varied testing. so, it includes more participants.</a:t>
-            </a:r>
-          </a:p>
-          <a:p>
-            <a:r>
-              <a:rPr lang="en-US" dirty="0"/>
-              <a:t>In Phase 2, step 1 is repeated to explain roles and methods to new stakeholders.</a:t>
-            </a:r>
-          </a:p>
-          <a:p>
-            <a:r>
-              <a:rPr lang="en-US" dirty="0"/>
-              <a:t>The evaluation leader recaps the results of steps 2–6 and presents current risks, non-risks, sensitivity points, and tradeoffs.</a:t>
+              <a:rPr lang="en-US" dirty="0">
+                <a:solidFill>
+                  <a:schemeClr val="accent4">
+                    <a:lumMod val="50000"/>
+                  </a:schemeClr>
+                </a:solidFill>
+              </a:rPr>
+              <a:t>Step 6: </a:t>
+            </a:r>
+            <a:r>
+              <a:rPr lang="en-US" dirty="0"/>
+              <a:t>Analyze the Architectural Approach</a:t>
+            </a:r>
+          </a:p>
+          <a:p>
+            <a:pPr lvl="1"/>
+            <a:r>
+              <a:rPr lang="en-US" dirty="0"/>
+              <a:t>The evaluation team examines the highest-ranked scenarios, asking the architect to explain how the architecture supports each one.</a:t>
+            </a:r>
+          </a:p>
+          <a:p>
+            <a:pPr lvl="1"/>
+            <a:r>
+              <a:rPr lang="en-US" dirty="0"/>
+              <a:t>The team documents relevant architectural decisions and identifies their risks, non-risks, and tradeoffs.</a:t>
+            </a:r>
+          </a:p>
+          <a:p>
+            <a:pPr lvl="1"/>
+            <a:r>
+              <a:rPr lang="en-US" b="1" dirty="0"/>
+              <a:t>Example</a:t>
+            </a:r>
+            <a:r>
+              <a:rPr lang="en-US" dirty="0"/>
+              <a:t>: The frequency of heartbeats affects failure detection time, high frequency improves availability but increases processing and bandwidth use. This is a tradeoff.</a:t>
+            </a:r>
+          </a:p>
+          <a:p>
+            <a:r>
+              <a:rPr lang="en-US" dirty="0"/>
+              <a:t>At the end of step 6, the team should have a clear picture of the architecture’s key aspects, rationale for decisions, and a list of risks, non-risks, sensitivity points, and tradeoffs.</a:t>
+            </a:r>
+          </a:p>
+          <a:p>
+            <a:r>
+              <a:rPr lang="en-US" dirty="0"/>
+              <a:t>Phase 1 concludes at this point.</a:t>
             </a:r>
           </a:p>
         </p:txBody>
@@ -5675,7 +5806,7 @@
           <p:cNvPr id="3" name="Title 2">
             <a:extLst>
               <a:ext uri="{FF2B5EF4-FFF2-40B4-BE49-F238E27FC236}">
-                <a16:creationId xmlns:a16="http://schemas.microsoft.com/office/drawing/2014/main" id="{059C89EE-C38B-52AB-EC90-0507238A0986}"/>
+                <a16:creationId xmlns:a16="http://schemas.microsoft.com/office/drawing/2014/main" id="{E1198459-2A16-24FD-0768-E5E04FFB90BC}"/>
               </a:ext>
             </a:extLst>
           </p:cNvPr>
@@ -5693,7 +5824,7 @@
           <a:p>
             <a:r>
               <a:rPr lang="en-US" dirty="0"/>
-              <a:t>Hiatus and Start of Phase 2</a:t>
+              <a:t>Phase 1</a:t>
             </a:r>
           </a:p>
         </p:txBody>
@@ -5703,7 +5834,7 @@
           <p:cNvPr id="4" name="Slide Number Placeholder 3">
             <a:extLst>
               <a:ext uri="{FF2B5EF4-FFF2-40B4-BE49-F238E27FC236}">
-                <a16:creationId xmlns:a16="http://schemas.microsoft.com/office/drawing/2014/main" id="{15342F2D-1C36-3A9B-8FD0-DC2989AC53E6}"/>
+                <a16:creationId xmlns:a16="http://schemas.microsoft.com/office/drawing/2014/main" id="{FB2E0131-F5DF-5DA9-60CA-A362D0B90E1D}"/>
               </a:ext>
             </a:extLst>
           </p:cNvPr>
@@ -5731,7 +5862,7 @@
     </p:spTree>
     <p:extLst>
       <p:ext uri="{BB962C8B-B14F-4D97-AF65-F5344CB8AC3E}">
-        <p14:creationId xmlns:p14="http://schemas.microsoft.com/office/powerpoint/2010/main" val="1940425391"/>
+        <p14:creationId xmlns:p14="http://schemas.microsoft.com/office/powerpoint/2010/main" val="2518216704"/>
       </p:ext>
     </p:extLst>
   </p:cSld>
@@ -5763,7 +5894,7 @@
           <p:cNvPr id="2" name="Content Placeholder 1">
             <a:extLst>
               <a:ext uri="{FF2B5EF4-FFF2-40B4-BE49-F238E27FC236}">
-                <a16:creationId xmlns:a16="http://schemas.microsoft.com/office/drawing/2014/main" id="{9819A25C-2044-3AD5-FA39-D27FBC61B043}"/>
+                <a16:creationId xmlns:a16="http://schemas.microsoft.com/office/drawing/2014/main" id="{2E2961C7-88C5-C27E-000D-32384B5D5C52}"/>
               </a:ext>
             </a:extLst>
           </p:cNvPr>
@@ -5781,65 +5912,25 @@
           <a:p>
             <a:r>
               <a:rPr lang="en-US" dirty="0"/>
-              <a:t>Step 7: Brainstorm and Prioritize Scenarios</a:t>
-            </a:r>
-          </a:p>
-          <a:p>
-            <a:pPr lvl="1"/>
-            <a:r>
-              <a:rPr lang="en-US" dirty="0"/>
-              <a:t>Stakeholders brainstorm quality attribute scenarios based on their roles.</a:t>
-            </a:r>
-          </a:p>
-          <a:p>
-            <a:pPr lvl="1"/>
-            <a:r>
-              <a:rPr lang="en-US" b="1" dirty="0"/>
-              <a:t>Example</a:t>
-            </a:r>
-            <a:r>
-              <a:rPr lang="en-US" dirty="0"/>
-              <a:t>: A maintainer may suggest a modifiability scenario, while a user focuses on ease of operation.</a:t>
-            </a:r>
-          </a:p>
-          <a:p>
-            <a:pPr lvl="1"/>
-            <a:r>
-              <a:rPr lang="en-US" altLang="en-US" dirty="0">
-                <a:latin typeface="+mj-lt"/>
-              </a:rPr>
-              <a:t>This step captures the stakeholder community’s view of what system success looks like.</a:t>
-            </a:r>
-          </a:p>
-          <a:p>
-            <a:pPr lvl="1"/>
-            <a:r>
-              <a:rPr lang="en-US" dirty="0"/>
-              <a:t>Once collected, scenarios are prioritized to guide the evaluation team's focus.</a:t>
-            </a:r>
-          </a:p>
-          <a:p>
-            <a:pPr lvl="1"/>
-            <a:r>
-              <a:rPr lang="en-US" dirty="0"/>
-              <a:t>The prioritized scenarios are compared with the utility tree results.</a:t>
-            </a:r>
-          </a:p>
-          <a:p>
-            <a:pPr lvl="1"/>
-            <a:r>
-              <a:rPr lang="en-US" dirty="0"/>
-              <a:t>Agreement indicates alignment between architect intentions and stakeholder expectations.</a:t>
-            </a:r>
-            <a:endParaRPr lang="en-US" altLang="en-US" dirty="0">
-              <a:latin typeface="+mj-lt"/>
-            </a:endParaRPr>
-          </a:p>
-          <a:p>
-            <a:pPr lvl="1"/>
-            <a:r>
-              <a:rPr lang="en-US" dirty="0"/>
-              <a:t>If new important scenarios emerge, and the discrepancy is large, this may reveal risk due to misalignment.</a:t>
+              <a:t>After Phase 1, there is a hiatus of about a week to summarize findings and clarify open questions.</a:t>
+            </a:r>
+          </a:p>
+          <a:p>
+            <a:r>
+              <a:rPr lang="en-US" dirty="0"/>
+              <a:t>Phase 1 is like testing your own code; Phase 2 is like giving it to QA for more varied testing. so, it includes more participants.</a:t>
+            </a:r>
+          </a:p>
+          <a:p>
+            <a:r>
+              <a:rPr lang="en-US" dirty="0"/>
+              <a:t>In Phase 2, step 1 is repeated to explain roles and methods to new stakeholders.</a:t>
+            </a:r>
+          </a:p>
+          <a:p>
+            <a:r>
+              <a:rPr lang="en-US" dirty="0"/>
+              <a:t>The evaluation leader recaps the results of steps 2–6 and presents current risks, non-risks, sensitivity points, and tradeoffs.</a:t>
             </a:r>
           </a:p>
         </p:txBody>
@@ -5849,7 +5940,7 @@
           <p:cNvPr id="3" name="Title 2">
             <a:extLst>
               <a:ext uri="{FF2B5EF4-FFF2-40B4-BE49-F238E27FC236}">
-                <a16:creationId xmlns:a16="http://schemas.microsoft.com/office/drawing/2014/main" id="{6C956028-C508-A582-B798-221820ACB53F}"/>
+                <a16:creationId xmlns:a16="http://schemas.microsoft.com/office/drawing/2014/main" id="{059C89EE-C38B-52AB-EC90-0507238A0986}"/>
               </a:ext>
             </a:extLst>
           </p:cNvPr>
@@ -5867,7 +5958,7 @@
           <a:p>
             <a:r>
               <a:rPr lang="en-US" dirty="0"/>
-              <a:t>Phase 2</a:t>
+              <a:t>Hiatus and Start of Phase 2</a:t>
             </a:r>
           </a:p>
         </p:txBody>
@@ -5877,7 +5968,7 @@
           <p:cNvPr id="4" name="Slide Number Placeholder 3">
             <a:extLst>
               <a:ext uri="{FF2B5EF4-FFF2-40B4-BE49-F238E27FC236}">
-                <a16:creationId xmlns:a16="http://schemas.microsoft.com/office/drawing/2014/main" id="{EA0C91D9-275D-6A54-1A4C-3F99ABD47C2A}"/>
+                <a16:creationId xmlns:a16="http://schemas.microsoft.com/office/drawing/2014/main" id="{15342F2D-1C36-3A9B-8FD0-DC2989AC53E6}"/>
               </a:ext>
             </a:extLst>
           </p:cNvPr>
@@ -5905,7 +5996,7 @@
     </p:spTree>
     <p:extLst>
       <p:ext uri="{BB962C8B-B14F-4D97-AF65-F5344CB8AC3E}">
-        <p14:creationId xmlns:p14="http://schemas.microsoft.com/office/powerpoint/2010/main" val="4263009573"/>
+        <p14:creationId xmlns:p14="http://schemas.microsoft.com/office/powerpoint/2010/main" val="1940425391"/>
       </p:ext>
     </p:extLst>
   </p:cSld>
@@ -5937,7 +6028,7 @@
           <p:cNvPr id="2" name="Content Placeholder 1">
             <a:extLst>
               <a:ext uri="{FF2B5EF4-FFF2-40B4-BE49-F238E27FC236}">
-                <a16:creationId xmlns:a16="http://schemas.microsoft.com/office/drawing/2014/main" id="{223E60FB-3CB4-60A8-7A30-A9D87C16AE41}"/>
+                <a16:creationId xmlns:a16="http://schemas.microsoft.com/office/drawing/2014/main" id="{9819A25C-2044-3AD5-FA39-D27FBC61B043}"/>
               </a:ext>
             </a:extLst>
           </p:cNvPr>
@@ -5954,29 +6045,76 @@
           <a:lstStyle/>
           <a:p>
             <a:r>
-              <a:rPr lang="en-US" dirty="0"/>
-              <a:t>Step 8: Analyze the Architectural Approaches</a:t>
+              <a:rPr lang="en-US" dirty="0">
+                <a:solidFill>
+                  <a:schemeClr val="accent4">
+                    <a:lumMod val="50000"/>
+                  </a:schemeClr>
+                </a:solidFill>
+              </a:rPr>
+              <a:t>Step 7: </a:t>
+            </a:r>
+            <a:r>
+              <a:rPr lang="en-US" dirty="0"/>
+              <a:t>Brainstorm and Prioritize Scenarios</a:t>
             </a:r>
           </a:p>
           <a:p>
             <a:pPr lvl="1"/>
             <a:r>
               <a:rPr lang="en-US" dirty="0"/>
-              <a:t>After the scenarios have been collected and prioritized, the evaluation team guides the architect in analyzing the highest-ranked scenarios.</a:t>
+              <a:t>Stakeholders brainstorm quality attribute scenarios based on their roles.</a:t>
             </a:r>
           </a:p>
           <a:p>
             <a:pPr lvl="1"/>
             <a:r>
-              <a:rPr lang="en-US" dirty="0"/>
-              <a:t>The architect explains how architectural decisions contribute to realizing each scenario.</a:t>
+              <a:rPr lang="en-US" b="1" dirty="0"/>
+              <a:t>Example</a:t>
+            </a:r>
+            <a:r>
+              <a:rPr lang="en-US" dirty="0"/>
+              <a:t>: A maintainer may suggest a modifiability scenario, while a user focuses on ease of operation.</a:t>
             </a:r>
           </a:p>
           <a:p>
             <a:pPr lvl="1"/>
             <a:r>
-              <a:rPr lang="en-US" dirty="0"/>
-              <a:t>The evaluation team performs the same activities as in step 6, but now with the newly generated scenarios.</a:t>
+              <a:rPr lang="en-US" altLang="en-US" dirty="0">
+                <a:latin typeface="+mj-lt"/>
+              </a:rPr>
+              <a:t>This step captures the stakeholder community’s view of what system success looks like.</a:t>
+            </a:r>
+          </a:p>
+          <a:p>
+            <a:pPr lvl="1"/>
+            <a:r>
+              <a:rPr lang="en-US" dirty="0"/>
+              <a:t>Once collected, scenarios are prioritized to guide the evaluation team's focus.</a:t>
+            </a:r>
+          </a:p>
+          <a:p>
+            <a:pPr lvl="1"/>
+            <a:r>
+              <a:rPr lang="en-US" dirty="0"/>
+              <a:t>The prioritized scenarios are compared with the utility tree results.</a:t>
+            </a:r>
+          </a:p>
+          <a:p>
+            <a:pPr lvl="1"/>
+            <a:r>
+              <a:rPr lang="en-US" dirty="0"/>
+              <a:t>Agreement indicates alignment between architect intentions and stakeholder expectations.</a:t>
+            </a:r>
+            <a:endParaRPr lang="en-US" altLang="en-US" dirty="0">
+              <a:latin typeface="+mj-lt"/>
+            </a:endParaRPr>
+          </a:p>
+          <a:p>
+            <a:pPr lvl="1"/>
+            <a:r>
+              <a:rPr lang="en-US" dirty="0"/>
+              <a:t>If new important scenarios emerge, and the discrepancy is large, this may reveal risk due to misalignment.</a:t>
             </a:r>
           </a:p>
         </p:txBody>
@@ -5986,7 +6124,7 @@
           <p:cNvPr id="3" name="Title 2">
             <a:extLst>
               <a:ext uri="{FF2B5EF4-FFF2-40B4-BE49-F238E27FC236}">
-                <a16:creationId xmlns:a16="http://schemas.microsoft.com/office/drawing/2014/main" id="{3CE562F4-3E60-95EE-93D4-060F151BE16B}"/>
+                <a16:creationId xmlns:a16="http://schemas.microsoft.com/office/drawing/2014/main" id="{6C956028-C508-A582-B798-221820ACB53F}"/>
               </a:ext>
             </a:extLst>
           </p:cNvPr>
@@ -6014,7 +6152,7 @@
           <p:cNvPr id="4" name="Slide Number Placeholder 3">
             <a:extLst>
               <a:ext uri="{FF2B5EF4-FFF2-40B4-BE49-F238E27FC236}">
-                <a16:creationId xmlns:a16="http://schemas.microsoft.com/office/drawing/2014/main" id="{299770C5-7DF5-56B1-AD96-E97CDBE5E287}"/>
+                <a16:creationId xmlns:a16="http://schemas.microsoft.com/office/drawing/2014/main" id="{EA0C91D9-275D-6A54-1A4C-3F99ABD47C2A}"/>
               </a:ext>
             </a:extLst>
           </p:cNvPr>
@@ -6042,7 +6180,7 @@
     </p:spTree>
     <p:extLst>
       <p:ext uri="{BB962C8B-B14F-4D97-AF65-F5344CB8AC3E}">
-        <p14:creationId xmlns:p14="http://schemas.microsoft.com/office/powerpoint/2010/main" val="3705200936"/>
+        <p14:creationId xmlns:p14="http://schemas.microsoft.com/office/powerpoint/2010/main" val="4263009573"/>
       </p:ext>
     </p:extLst>
   </p:cSld>
@@ -6074,7 +6212,7 @@
           <p:cNvPr id="2" name="Content Placeholder 1">
             <a:extLst>
               <a:ext uri="{FF2B5EF4-FFF2-40B4-BE49-F238E27FC236}">
-                <a16:creationId xmlns:a16="http://schemas.microsoft.com/office/drawing/2014/main" id="{741E7BEB-FAF6-8CA2-22BA-7C3D9FDA032D}"/>
+                <a16:creationId xmlns:a16="http://schemas.microsoft.com/office/drawing/2014/main" id="{223E60FB-3CB4-60A8-7A30-A9D87C16AE41}"/>
               </a:ext>
             </a:extLst>
           </p:cNvPr>
@@ -6091,82 +6229,39 @@
           <a:lstStyle/>
           <a:p>
             <a:r>
-              <a:rPr lang="en-US" dirty="0"/>
-              <a:t>Step 9: Present the Results</a:t>
+              <a:rPr lang="en-US" dirty="0">
+                <a:solidFill>
+                  <a:schemeClr val="accent4">
+                    <a:lumMod val="50000"/>
+                  </a:schemeClr>
+                </a:solidFill>
+              </a:rPr>
+              <a:t>Step 8: </a:t>
+            </a:r>
+            <a:r>
+              <a:rPr lang="en-US" dirty="0"/>
+              <a:t>Analyze the Architectural Approaches</a:t>
             </a:r>
           </a:p>
           <a:p>
             <a:pPr lvl="1"/>
             <a:r>
               <a:rPr lang="en-US" dirty="0"/>
-              <a:t>The evaluation team groups risks into risk themes based on common concerns or systemic deficiencies.</a:t>
+              <a:t>After the scenarios have been collected and prioritized, the evaluation team guides the architect in analyzing the highest-ranked scenarios.</a:t>
             </a:r>
           </a:p>
           <a:p>
             <a:pPr lvl="1"/>
             <a:r>
-              <a:rPr lang="en-US" b="1" dirty="0"/>
-              <a:t>Example</a:t>
-            </a:r>
-            <a:r>
-              <a:rPr lang="en-US" dirty="0"/>
-              <a:t>: Risks about outdated documentation may lead to a theme about insufficient attention to documentation.</a:t>
+              <a:rPr lang="en-US" dirty="0"/>
+              <a:t>The architect explains how architectural decisions contribute to realizing each scenario.</a:t>
             </a:r>
           </a:p>
           <a:p>
             <a:pPr lvl="1"/>
             <a:r>
               <a:rPr lang="en-US" dirty="0"/>
-              <a:t>This process highlights risks as threats to business concerns, elevating them for management attention.</a:t>
-            </a:r>
-          </a:p>
-          <a:p>
-            <a:pPr lvl="1"/>
-            <a:r>
-              <a:rPr lang="en-US" dirty="0"/>
-              <a:t>The following results are presented to stakeholders:</a:t>
-            </a:r>
-          </a:p>
-          <a:p>
-            <a:pPr lvl="2"/>
-            <a:r>
-              <a:rPr lang="en-US" dirty="0"/>
-              <a:t>Documented architectural approaches</a:t>
-            </a:r>
-          </a:p>
-          <a:p>
-            <a:pPr lvl="2"/>
-            <a:r>
-              <a:rPr lang="en-US" dirty="0"/>
-              <a:t>Prioritized scenario list</a:t>
-            </a:r>
-          </a:p>
-          <a:p>
-            <a:pPr lvl="2"/>
-            <a:r>
-              <a:rPr lang="en-US" dirty="0"/>
-              <a:t>Utility tree</a:t>
-            </a:r>
-          </a:p>
-          <a:p>
-            <a:pPr lvl="2"/>
-            <a:r>
-              <a:rPr lang="en-US" dirty="0"/>
-              <a:t>Identified risks and non-risks</a:t>
-            </a:r>
-          </a:p>
-          <a:p>
-            <a:pPr lvl="2"/>
-            <a:r>
-              <a:rPr lang="en-US" dirty="0"/>
-              <a:t>Sensitivity points and tradeoffs</a:t>
-            </a:r>
-          </a:p>
-          <a:p>
-            <a:pPr lvl="2"/>
-            <a:r>
-              <a:rPr lang="en-US" dirty="0"/>
-              <a:t>Risk themes and affected business goals</a:t>
+              <a:t>The evaluation team performs the same activities as in step 6, but now with the newly generated scenarios.</a:t>
             </a:r>
           </a:p>
         </p:txBody>
@@ -6176,7 +6271,7 @@
           <p:cNvPr id="3" name="Title 2">
             <a:extLst>
               <a:ext uri="{FF2B5EF4-FFF2-40B4-BE49-F238E27FC236}">
-                <a16:creationId xmlns:a16="http://schemas.microsoft.com/office/drawing/2014/main" id="{7AFFFAF0-231B-0195-281C-F4E1F63C0944}"/>
+                <a16:creationId xmlns:a16="http://schemas.microsoft.com/office/drawing/2014/main" id="{3CE562F4-3E60-95EE-93D4-060F151BE16B}"/>
               </a:ext>
             </a:extLst>
           </p:cNvPr>
@@ -6204,7 +6299,7 @@
           <p:cNvPr id="4" name="Slide Number Placeholder 3">
             <a:extLst>
               <a:ext uri="{FF2B5EF4-FFF2-40B4-BE49-F238E27FC236}">
-                <a16:creationId xmlns:a16="http://schemas.microsoft.com/office/drawing/2014/main" id="{54CDB298-B879-502C-4A53-86F1C2C2CA35}"/>
+                <a16:creationId xmlns:a16="http://schemas.microsoft.com/office/drawing/2014/main" id="{299770C5-7DF5-56B1-AD96-E97CDBE5E287}"/>
               </a:ext>
             </a:extLst>
           </p:cNvPr>
@@ -6232,7 +6327,7 @@
     </p:spTree>
     <p:extLst>
       <p:ext uri="{BB962C8B-B14F-4D97-AF65-F5344CB8AC3E}">
-        <p14:creationId xmlns:p14="http://schemas.microsoft.com/office/powerpoint/2010/main" val="2597009415"/>
+        <p14:creationId xmlns:p14="http://schemas.microsoft.com/office/powerpoint/2010/main" val="3705200936"/>
       </p:ext>
     </p:extLst>
   </p:cSld>
@@ -6264,7 +6359,7 @@
           <p:cNvPr id="2" name="Content Placeholder 1">
             <a:extLst>
               <a:ext uri="{FF2B5EF4-FFF2-40B4-BE49-F238E27FC236}">
-                <a16:creationId xmlns:a16="http://schemas.microsoft.com/office/drawing/2014/main" id="{2FA3C861-E313-6A6D-24E3-75428063C468}"/>
+                <a16:creationId xmlns:a16="http://schemas.microsoft.com/office/drawing/2014/main" id="{741E7BEB-FAF6-8CA2-22BA-7C3D9FDA032D}"/>
               </a:ext>
             </a:extLst>
           </p:cNvPr>
@@ -6281,42 +6376,93 @@
           <a:lstStyle/>
           <a:p>
             <a:r>
-              <a:rPr lang="en-US" dirty="0"/>
-              <a:t>The </a:t>
-            </a:r>
-            <a:r>
               <a:rPr lang="en-US" dirty="0">
                 <a:solidFill>
-                  <a:schemeClr val="accent1"/>
+                  <a:schemeClr val="accent4">
+                    <a:lumMod val="50000"/>
+                  </a:schemeClr>
                 </a:solidFill>
               </a:rPr>
-              <a:t>Lightweight Architecture Evaluation </a:t>
-            </a:r>
-            <a:r>
-              <a:rPr lang="en-US" dirty="0"/>
-              <a:t>(LAE) method is intended to be used in a project-internal context where the reviewing is carried out by peers on a regular basis.</a:t>
-            </a:r>
-          </a:p>
-          <a:p>
-            <a:r>
-              <a:rPr lang="en-US" dirty="0"/>
-              <a:t>It uses the same concepts as the ATAM and is meant to be performed regularly.</a:t>
-            </a:r>
-          </a:p>
-          <a:p>
-            <a:r>
-              <a:rPr lang="en-US" dirty="0"/>
-              <a:t>An LAE session may focus on what has changed since the prior review or examine a previously unexamined portion of the architecture.</a:t>
-            </a:r>
-          </a:p>
-          <a:p>
-            <a:r>
-              <a:rPr lang="en-US" dirty="0"/>
-              <a:t>Because of this limited scope, many of the ATAM’s steps can be omitted or shortened.</a:t>
-            </a:r>
-          </a:p>
-          <a:p>
-            <a:endParaRPr lang="en-US" dirty="0"/>
+              <a:t>Step 9: </a:t>
+            </a:r>
+            <a:r>
+              <a:rPr lang="en-US" dirty="0"/>
+              <a:t>Present the Results</a:t>
+            </a:r>
+          </a:p>
+          <a:p>
+            <a:pPr lvl="1"/>
+            <a:r>
+              <a:rPr lang="en-US" dirty="0"/>
+              <a:t>The evaluation team groups risks into risk themes based on common concerns or systemic deficiencies.</a:t>
+            </a:r>
+          </a:p>
+          <a:p>
+            <a:pPr lvl="1"/>
+            <a:r>
+              <a:rPr lang="en-US" b="1" dirty="0"/>
+              <a:t>Example</a:t>
+            </a:r>
+            <a:r>
+              <a:rPr lang="en-US" dirty="0"/>
+              <a:t>: Risks about outdated documentation may lead to a theme about insufficient attention to documentation.</a:t>
+            </a:r>
+          </a:p>
+          <a:p>
+            <a:pPr lvl="1"/>
+            <a:r>
+              <a:rPr lang="en-US" dirty="0"/>
+              <a:t>This process highlights risks as threats to business concerns, elevating them for management attention.</a:t>
+            </a:r>
+          </a:p>
+          <a:p>
+            <a:pPr lvl="1"/>
+            <a:r>
+              <a:rPr lang="en-US" dirty="0"/>
+              <a:t>The following results are presented to stakeholders:</a:t>
+            </a:r>
+          </a:p>
+          <a:p>
+            <a:pPr lvl="2"/>
+            <a:r>
+              <a:rPr lang="en-US" dirty="0"/>
+              <a:t>Documented architectural approaches</a:t>
+            </a:r>
+          </a:p>
+          <a:p>
+            <a:pPr lvl="2"/>
+            <a:r>
+              <a:rPr lang="en-US" dirty="0"/>
+              <a:t>Prioritized scenario list</a:t>
+            </a:r>
+          </a:p>
+          <a:p>
+            <a:pPr lvl="2"/>
+            <a:r>
+              <a:rPr lang="en-US" dirty="0"/>
+              <a:t>Utility tree</a:t>
+            </a:r>
+          </a:p>
+          <a:p>
+            <a:pPr lvl="2"/>
+            <a:r>
+              <a:rPr lang="en-US" dirty="0"/>
+              <a:t>Identified risks and non-risks</a:t>
+            </a:r>
+          </a:p>
+          <a:p>
+            <a:pPr lvl="2"/>
+            <a:r>
+              <a:rPr lang="en-US" dirty="0"/>
+              <a:t>Sensitivity points and tradeoffs</a:t>
+            </a:r>
+          </a:p>
+          <a:p>
+            <a:pPr lvl="2"/>
+            <a:r>
+              <a:rPr lang="en-US" dirty="0"/>
+              <a:t>Risk themes and affected business goals</a:t>
+            </a:r>
           </a:p>
         </p:txBody>
       </p:sp>
@@ -6325,7 +6471,7 @@
           <p:cNvPr id="3" name="Title 2">
             <a:extLst>
               <a:ext uri="{FF2B5EF4-FFF2-40B4-BE49-F238E27FC236}">
-                <a16:creationId xmlns:a16="http://schemas.microsoft.com/office/drawing/2014/main" id="{74A1BC22-C132-3E97-30B3-3C4B40FC5310}"/>
+                <a16:creationId xmlns:a16="http://schemas.microsoft.com/office/drawing/2014/main" id="{7AFFFAF0-231B-0195-281C-F4E1F63C0944}"/>
               </a:ext>
             </a:extLst>
           </p:cNvPr>
@@ -6343,7 +6489,7 @@
           <a:p>
             <a:r>
               <a:rPr lang="en-US" dirty="0"/>
-              <a:t>Lightweight Architecture Evaluation</a:t>
+              <a:t>Phase 2</a:t>
             </a:r>
           </a:p>
         </p:txBody>
@@ -6353,7 +6499,7 @@
           <p:cNvPr id="4" name="Slide Number Placeholder 3">
             <a:extLst>
               <a:ext uri="{FF2B5EF4-FFF2-40B4-BE49-F238E27FC236}">
-                <a16:creationId xmlns:a16="http://schemas.microsoft.com/office/drawing/2014/main" id="{60BBF8EF-103D-06E9-AD80-9F76079023E1}"/>
+                <a16:creationId xmlns:a16="http://schemas.microsoft.com/office/drawing/2014/main" id="{54CDB298-B879-502C-4A53-86F1C2C2CA35}"/>
               </a:ext>
             </a:extLst>
           </p:cNvPr>
@@ -6381,7 +6527,7 @@
     </p:spTree>
     <p:extLst>
       <p:ext uri="{BB962C8B-B14F-4D97-AF65-F5344CB8AC3E}">
-        <p14:creationId xmlns:p14="http://schemas.microsoft.com/office/powerpoint/2010/main" val="862792448"/>
+        <p14:creationId xmlns:p14="http://schemas.microsoft.com/office/powerpoint/2010/main" val="2597009415"/>
       </p:ext>
     </p:extLst>
   </p:cSld>
@@ -6413,7 +6559,7 @@
           <p:cNvPr id="2" name="Content Placeholder 1">
             <a:extLst>
               <a:ext uri="{FF2B5EF4-FFF2-40B4-BE49-F238E27FC236}">
-                <a16:creationId xmlns:a16="http://schemas.microsoft.com/office/drawing/2014/main" id="{3D828C80-5879-1F80-936F-6ECDAF73BA5C}"/>
+                <a16:creationId xmlns:a16="http://schemas.microsoft.com/office/drawing/2014/main" id="{2FA3C861-E313-6A6D-24E3-75428063C468}"/>
               </a:ext>
             </a:extLst>
           </p:cNvPr>
@@ -6431,31 +6577,37 @@
           <a:p>
             <a:r>
               <a:rPr lang="en-US" dirty="0"/>
-              <a:t>LAE involves fewer participants than ATAM, making it quicker to reach shared understanding.</a:t>
-            </a:r>
-          </a:p>
-          <a:p>
-            <a:r>
-              <a:rPr lang="en-US" dirty="0"/>
-              <a:t>There is no final report, but a scribe captures results to guide risk remediation.</a:t>
-            </a:r>
-          </a:p>
-          <a:p>
-            <a:r>
-              <a:rPr lang="en-US" dirty="0"/>
-              <a:t>It is carried out entirely by members internal to the organization.</a:t>
-            </a:r>
-          </a:p>
-          <a:p>
-            <a:r>
-              <a:rPr lang="en-US" dirty="0"/>
-              <a:t>The internal team may be less objective, leading to fewer new ideas or dissenting opinions.</a:t>
-            </a:r>
-          </a:p>
-          <a:p>
-            <a:r>
-              <a:rPr lang="en-US" dirty="0"/>
-              <a:t>Nevertheless, LAE is inexpensive, easy to organize, and provides fast, low-ceremony architecture quality assurance.</a:t>
+              <a:t>The </a:t>
+            </a:r>
+            <a:r>
+              <a:rPr lang="en-US" dirty="0">
+                <a:solidFill>
+                  <a:schemeClr val="accent1"/>
+                </a:solidFill>
+              </a:rPr>
+              <a:t>Lightweight Architecture Evaluation </a:t>
+            </a:r>
+            <a:r>
+              <a:rPr lang="en-US" dirty="0"/>
+              <a:t>(LAE) method is intended to be used in a project-internal context where the reviewing is carried out by peers on a regular basis.</a:t>
+            </a:r>
+          </a:p>
+          <a:p>
+            <a:r>
+              <a:rPr lang="en-US" dirty="0"/>
+              <a:t>It uses the same concepts as the ATAM and is meant to be performed regularly.</a:t>
+            </a:r>
+          </a:p>
+          <a:p>
+            <a:r>
+              <a:rPr lang="en-US" dirty="0"/>
+              <a:t>An LAE session may focus on what has changed since the prior review or examine a previously unexamined portion of the architecture.</a:t>
+            </a:r>
+          </a:p>
+          <a:p>
+            <a:r>
+              <a:rPr lang="en-US" dirty="0"/>
+              <a:t>Because of this limited scope, many of the ATAM’s steps can be omitted or shortened.</a:t>
             </a:r>
           </a:p>
           <a:p>
@@ -6468,7 +6620,7 @@
           <p:cNvPr id="3" name="Title 2">
             <a:extLst>
               <a:ext uri="{FF2B5EF4-FFF2-40B4-BE49-F238E27FC236}">
-                <a16:creationId xmlns:a16="http://schemas.microsoft.com/office/drawing/2014/main" id="{7937F2CC-FDD2-1B33-B281-9D2234B185BE}"/>
+                <a16:creationId xmlns:a16="http://schemas.microsoft.com/office/drawing/2014/main" id="{74A1BC22-C132-3E97-30B3-3C4B40FC5310}"/>
               </a:ext>
             </a:extLst>
           </p:cNvPr>
@@ -6496,7 +6648,7 @@
           <p:cNvPr id="4" name="Slide Number Placeholder 3">
             <a:extLst>
               <a:ext uri="{FF2B5EF4-FFF2-40B4-BE49-F238E27FC236}">
-                <a16:creationId xmlns:a16="http://schemas.microsoft.com/office/drawing/2014/main" id="{29B4C490-70D9-0594-D6BF-C3F4562F2AB7}"/>
+                <a16:creationId xmlns:a16="http://schemas.microsoft.com/office/drawing/2014/main" id="{60BBF8EF-103D-06E9-AD80-9F76079023E1}"/>
               </a:ext>
             </a:extLst>
           </p:cNvPr>
@@ -6524,7 +6676,7 @@
     </p:spTree>
     <p:extLst>
       <p:ext uri="{BB962C8B-B14F-4D97-AF65-F5344CB8AC3E}">
-        <p14:creationId xmlns:p14="http://schemas.microsoft.com/office/powerpoint/2010/main" val="3245885798"/>
+        <p14:creationId xmlns:p14="http://schemas.microsoft.com/office/powerpoint/2010/main" val="862792448"/>
       </p:ext>
     </p:extLst>
   </p:cSld>
@@ -6556,7 +6708,7 @@
           <p:cNvPr id="2" name="Content Placeholder 1">
             <a:extLst>
               <a:ext uri="{FF2B5EF4-FFF2-40B4-BE49-F238E27FC236}">
-                <a16:creationId xmlns:a16="http://schemas.microsoft.com/office/drawing/2014/main" id="{E5A5DB6E-45C0-34E0-80F6-8BABE570963A}"/>
+                <a16:creationId xmlns:a16="http://schemas.microsoft.com/office/drawing/2014/main" id="{3D828C80-5879-1F80-936F-6ECDAF73BA5C}"/>
               </a:ext>
             </a:extLst>
           </p:cNvPr>
@@ -6574,33 +6726,47 @@
           <a:p>
             <a:r>
               <a:rPr lang="en-US" dirty="0"/>
-              <a:t>If a system is important enough for you to explicitly design its architecture, then that architecture should be evaluated.</a:t>
-            </a:r>
-          </a:p>
-          <a:p>
-            <a:r>
-              <a:rPr lang="en-US" dirty="0"/>
-              <a:t>The ATAM is a comprehensive method for evaluating software architectures. </a:t>
-            </a:r>
-          </a:p>
-          <a:p>
-            <a:pPr lvl="1"/>
-            <a:r>
-              <a:rPr lang="en-US" dirty="0"/>
-              <a:t>It works by having project decision makers and stakeholders articulate a precise list of quality attribute requirements and by illuminating the architectural decisions relevant to analyzing each high-priority scenario.</a:t>
-            </a:r>
-          </a:p>
-          <a:p>
-            <a:r>
-              <a:rPr lang="en-US" dirty="0"/>
-              <a:t>The decisions can then be understood in terms of risks or non-risks to find any trouble spots in the architecture.</a:t>
-            </a:r>
-          </a:p>
-          <a:p>
-            <a:r>
-              <a:rPr lang="en-US" dirty="0"/>
-              <a:t>Lightweight evaluations can be performed regularly as part of a project’s internal peer review activities. Lightweight Architecture Evaluation, based on the ATAM, provides an inexpensive, low-ceremony architecture evaluation that can be carried out in less than a day.</a:t>
-            </a:r>
+              <a:t>LAE involves </a:t>
+            </a:r>
+            <a:r>
+              <a:rPr lang="en-US" dirty="0">
+                <a:solidFill>
+                  <a:schemeClr val="accent1"/>
+                </a:solidFill>
+              </a:rPr>
+              <a:t>fewer participants </a:t>
+            </a:r>
+            <a:r>
+              <a:rPr lang="en-US" dirty="0"/>
+              <a:t>than ATAM, making it quicker to reach shared understanding.</a:t>
+            </a:r>
+          </a:p>
+          <a:p>
+            <a:r>
+              <a:rPr lang="en-US" dirty="0"/>
+              <a:t>There is no final report, but a scribe captures results to guide risk remediation.</a:t>
+            </a:r>
+          </a:p>
+          <a:p>
+            <a:r>
+              <a:rPr lang="en-US" dirty="0"/>
+              <a:t>It is carried out entirely by members internal to the organization.</a:t>
+            </a:r>
+          </a:p>
+          <a:p>
+            <a:r>
+              <a:rPr lang="en-US" dirty="0"/>
+              <a:t>The internal team may be less objective, leading to fewer new ideas or dissenting opinions.</a:t>
+            </a:r>
+          </a:p>
+          <a:p>
+            <a:r>
+              <a:rPr lang="en-US" dirty="0"/>
+              <a:t>Nevertheless, LAE is inexpensive, easy to organize, and provides fast, low-ceremony architecture quality assurance.</a:t>
+            </a:r>
+          </a:p>
+          <a:p>
+            <a:endParaRPr lang="en-US" dirty="0"/>
           </a:p>
         </p:txBody>
       </p:sp>
@@ -6609,7 +6775,7 @@
           <p:cNvPr id="3" name="Title 2">
             <a:extLst>
               <a:ext uri="{FF2B5EF4-FFF2-40B4-BE49-F238E27FC236}">
-                <a16:creationId xmlns:a16="http://schemas.microsoft.com/office/drawing/2014/main" id="{63A90C3D-CF56-AF56-B401-5B22CC0D926E}"/>
+                <a16:creationId xmlns:a16="http://schemas.microsoft.com/office/drawing/2014/main" id="{7937F2CC-FDD2-1B33-B281-9D2234B185BE}"/>
               </a:ext>
             </a:extLst>
           </p:cNvPr>
@@ -6627,7 +6793,7 @@
           <a:p>
             <a:r>
               <a:rPr lang="en-US" dirty="0"/>
-              <a:t>Summary</a:t>
+              <a:t>Lightweight Architecture Evaluation</a:t>
             </a:r>
           </a:p>
         </p:txBody>
@@ -6637,7 +6803,7 @@
           <p:cNvPr id="4" name="Slide Number Placeholder 3">
             <a:extLst>
               <a:ext uri="{FF2B5EF4-FFF2-40B4-BE49-F238E27FC236}">
-                <a16:creationId xmlns:a16="http://schemas.microsoft.com/office/drawing/2014/main" id="{16579F55-78C6-D687-E40D-0A93FDD5EE0F}"/>
+                <a16:creationId xmlns:a16="http://schemas.microsoft.com/office/drawing/2014/main" id="{29B4C490-70D9-0594-D6BF-C3F4562F2AB7}"/>
               </a:ext>
             </a:extLst>
           </p:cNvPr>
@@ -6657,6 +6823,147 @@
               <a:rPr lang="en-US" smtClean="0"/>
               <a:pPr/>
               <a:t>28</a:t>
+            </a:fld>
+            <a:endParaRPr lang="en-US" dirty="0"/>
+          </a:p>
+        </p:txBody>
+      </p:sp>
+    </p:spTree>
+    <p:extLst>
+      <p:ext uri="{BB962C8B-B14F-4D97-AF65-F5344CB8AC3E}">
+        <p14:creationId xmlns:p14="http://schemas.microsoft.com/office/powerpoint/2010/main" val="3245885798"/>
+      </p:ext>
+    </p:extLst>
+  </p:cSld>
+  <p:clrMapOvr>
+    <a:masterClrMapping/>
+  </p:clrMapOvr>
+</p:sld>
+</file>
+
+<file path=ppt/slides/slide29.xml><?xml version="1.0" encoding="utf-8"?>
+<p:sld xmlns:a="http://schemas.openxmlformats.org/drawingml/2006/main" xmlns:r="http://schemas.openxmlformats.org/officeDocument/2006/relationships" xmlns:p="http://schemas.openxmlformats.org/presentationml/2006/main">
+  <p:cSld>
+    <p:spTree>
+      <p:nvGrpSpPr>
+        <p:cNvPr id="1" name=""/>
+        <p:cNvGrpSpPr/>
+        <p:nvPr/>
+      </p:nvGrpSpPr>
+      <p:grpSpPr>
+        <a:xfrm>
+          <a:off x="0" y="0"/>
+          <a:ext cx="0" cy="0"/>
+          <a:chOff x="0" y="0"/>
+          <a:chExt cx="0" cy="0"/>
+        </a:xfrm>
+      </p:grpSpPr>
+      <p:sp>
+        <p:nvSpPr>
+          <p:cNvPr id="2" name="Content Placeholder 1">
+            <a:extLst>
+              <a:ext uri="{FF2B5EF4-FFF2-40B4-BE49-F238E27FC236}">
+                <a16:creationId xmlns:a16="http://schemas.microsoft.com/office/drawing/2014/main" id="{E5A5DB6E-45C0-34E0-80F6-8BABE570963A}"/>
+              </a:ext>
+            </a:extLst>
+          </p:cNvPr>
+          <p:cNvSpPr>
+            <a:spLocks noGrp="1"/>
+          </p:cNvSpPr>
+          <p:nvPr>
+            <p:ph sz="half" idx="2"/>
+          </p:nvPr>
+        </p:nvSpPr>
+        <p:spPr/>
+        <p:txBody>
+          <a:bodyPr/>
+          <a:lstStyle/>
+          <a:p>
+            <a:r>
+              <a:rPr lang="en-US" dirty="0"/>
+              <a:t>If a system is important enough for you to explicitly design its architecture, then that architecture should be evaluated.</a:t>
+            </a:r>
+          </a:p>
+          <a:p>
+            <a:r>
+              <a:rPr lang="en-US" dirty="0"/>
+              <a:t>The ATAM is a comprehensive method for evaluating software architectures. </a:t>
+            </a:r>
+          </a:p>
+          <a:p>
+            <a:pPr lvl="1"/>
+            <a:r>
+              <a:rPr lang="en-US" dirty="0"/>
+              <a:t>It works by having project decision makers and stakeholders articulate a precise list of quality attribute requirements and by illuminating the architectural decisions relevant to analyzing each high-priority scenario.</a:t>
+            </a:r>
+          </a:p>
+          <a:p>
+            <a:r>
+              <a:rPr lang="en-US" dirty="0"/>
+              <a:t>The decisions can then be understood in terms of risks or non-risks to find any trouble spots in the architecture.</a:t>
+            </a:r>
+          </a:p>
+          <a:p>
+            <a:r>
+              <a:rPr lang="en-US" dirty="0"/>
+              <a:t>Lightweight evaluations can be performed regularly as part of a project’s internal peer review activities. Lightweight Architecture Evaluation, based on the ATAM, provides an inexpensive, low-ceremony architecture evaluation that can be carried out in less than a day.</a:t>
+            </a:r>
+          </a:p>
+        </p:txBody>
+      </p:sp>
+      <p:sp>
+        <p:nvSpPr>
+          <p:cNvPr id="3" name="Title 2">
+            <a:extLst>
+              <a:ext uri="{FF2B5EF4-FFF2-40B4-BE49-F238E27FC236}">
+                <a16:creationId xmlns:a16="http://schemas.microsoft.com/office/drawing/2014/main" id="{63A90C3D-CF56-AF56-B401-5B22CC0D926E}"/>
+              </a:ext>
+            </a:extLst>
+          </p:cNvPr>
+          <p:cNvSpPr>
+            <a:spLocks noGrp="1"/>
+          </p:cNvSpPr>
+          <p:nvPr>
+            <p:ph type="title"/>
+          </p:nvPr>
+        </p:nvSpPr>
+        <p:spPr/>
+        <p:txBody>
+          <a:bodyPr/>
+          <a:lstStyle/>
+          <a:p>
+            <a:r>
+              <a:rPr lang="en-US" dirty="0"/>
+              <a:t>Summary</a:t>
+            </a:r>
+          </a:p>
+        </p:txBody>
+      </p:sp>
+      <p:sp>
+        <p:nvSpPr>
+          <p:cNvPr id="4" name="Slide Number Placeholder 3">
+            <a:extLst>
+              <a:ext uri="{FF2B5EF4-FFF2-40B4-BE49-F238E27FC236}">
+                <a16:creationId xmlns:a16="http://schemas.microsoft.com/office/drawing/2014/main" id="{16579F55-78C6-D687-E40D-0A93FDD5EE0F}"/>
+              </a:ext>
+            </a:extLst>
+          </p:cNvPr>
+          <p:cNvSpPr>
+            <a:spLocks noGrp="1"/>
+          </p:cNvSpPr>
+          <p:nvPr>
+            <p:ph type="sldNum" sz="quarter" idx="10"/>
+          </p:nvPr>
+        </p:nvSpPr>
+        <p:spPr/>
+        <p:txBody>
+          <a:bodyPr/>
+          <a:lstStyle/>
+          <a:p>
+            <a:fld id="{AE311D09-C3D9-45E8-99CE-78E12234EEAD}" type="slidenum">
+              <a:rPr lang="en-US" smtClean="0"/>
+              <a:pPr/>
+              <a:t>29</a:t>
             </a:fld>
             <a:endParaRPr lang="en-US" dirty="0"/>
           </a:p>
@@ -7440,7 +7747,7 @@
           <a:p>
             <a:r>
               <a:rPr lang="en-US" dirty="0"/>
-              <a:t>Key evaluation activities align evaluation with the architecturally significant requirements that drive system success. </a:t>
+              <a:t>Key evaluation activities align evaluation with the ASRs that drive system success. </a:t>
             </a:r>
           </a:p>
           <a:p>
@@ -7608,19 +7915,61 @@
           <a:p>
             <a:r>
               <a:rPr lang="en-US" dirty="0"/>
-              <a:t>Evaluators should be highly skilled in the domain and the various quality attributes for which the system is to be evaluated.</a:t>
-            </a:r>
-          </a:p>
-          <a:p>
-            <a:r>
-              <a:rPr lang="en-US" dirty="0"/>
-              <a:t>Excellent organizational and facilitation skills are also a must for evaluators.</a:t>
-            </a:r>
-          </a:p>
-          <a:p>
-            <a:r>
-              <a:rPr lang="en-US" dirty="0"/>
-              <a:t>Architecture evaluations can be conducted by the architect, peer reviewers, or external experts, each bringing different strengths and perspectives.</a:t>
+              <a:t>Evaluators should be </a:t>
+            </a:r>
+            <a:r>
+              <a:rPr lang="en-US" dirty="0">
+                <a:solidFill>
+                  <a:schemeClr val="accent1"/>
+                </a:solidFill>
+              </a:rPr>
+              <a:t>highly skilled </a:t>
+            </a:r>
+            <a:r>
+              <a:rPr lang="en-US" dirty="0"/>
+              <a:t>in the domain and the various quality attributes for which the system is to be evaluated.</a:t>
+            </a:r>
+          </a:p>
+          <a:p>
+            <a:r>
+              <a:rPr lang="en-US" dirty="0"/>
+              <a:t>Architecture evaluations can be conducted by the </a:t>
+            </a:r>
+            <a:r>
+              <a:rPr lang="en-US" dirty="0">
+                <a:solidFill>
+                  <a:schemeClr val="accent1"/>
+                </a:solidFill>
+              </a:rPr>
+              <a:t>architect</a:t>
+            </a:r>
+            <a:r>
+              <a:rPr lang="en-US" dirty="0"/>
+              <a:t>, </a:t>
+            </a:r>
+            <a:r>
+              <a:rPr lang="en-US" dirty="0">
+                <a:solidFill>
+                  <a:schemeClr val="accent1"/>
+                </a:solidFill>
+              </a:rPr>
+              <a:t>peer reviewers</a:t>
+            </a:r>
+            <a:r>
+              <a:rPr lang="en-US" dirty="0"/>
+              <a:t>, or </a:t>
+            </a:r>
+            <a:r>
+              <a:rPr lang="en-US" dirty="0">
+                <a:solidFill>
+                  <a:schemeClr val="accent1"/>
+                </a:solidFill>
+              </a:rPr>
+              <a:t>external experts</a:t>
+            </a:r>
+            <a:r>
+              <a:rPr lang="en-US" dirty="0"/>
+              <a:t>, each bringing different strengths and perspectives.</a:t>
             </a:r>
           </a:p>
           <a:p>
@@ -7639,7 +7988,7 @@
             <a:pPr lvl="1"/>
             <a:r>
               <a:rPr lang="en-US" dirty="0"/>
-              <a:t>Evaluation is done—implicitly or explicitly—every time the architect makes a key design decision to address an ASR or completes a design milestone.</a:t>
+              <a:t>Evaluation is done every time the architect makes a key design decision to address an ASR or completes a design milestone.</a:t>
             </a:r>
           </a:p>
           <a:p>
@@ -7789,14 +8138,38 @@
             <a:pPr lvl="1"/>
             <a:r>
               <a:rPr lang="en-US" dirty="0"/>
-              <a:t>There should be a fixed amount of time for the peer review, typically several hours to half a day.</a:t>
+              <a:t>There should be a fixed amount of time for the peer review, typically </a:t>
+            </a:r>
+            <a:r>
+              <a:rPr lang="en-US" dirty="0">
+                <a:solidFill>
+                  <a:schemeClr val="accent1"/>
+                </a:solidFill>
+              </a:rPr>
+              <a:t>several hours </a:t>
+            </a:r>
+            <a:r>
+              <a:rPr lang="en-US" dirty="0"/>
+              <a:t>to half a day.</a:t>
             </a:r>
           </a:p>
           <a:p>
             <a:pPr lvl="1"/>
             <a:r>
               <a:rPr lang="en-US" dirty="0"/>
-              <a:t>If the designers are using the ADD process, then a peer review can be done at the end of step 7 of each ADD iteration.</a:t>
+              <a:t>If the designers are using the ADD process, then a peer review can be done at the </a:t>
+            </a:r>
+            <a:r>
+              <a:rPr lang="en-US" dirty="0">
+                <a:solidFill>
+                  <a:schemeClr val="accent1"/>
+                </a:solidFill>
+              </a:rPr>
+              <a:t>end of step 7</a:t>
+            </a:r>
+            <a:r>
+              <a:rPr lang="en-US" dirty="0"/>
+              <a:t> of each ADD iteration.</a:t>
             </a:r>
             <a:endParaRPr lang="en-US" dirty="0">
               <a:solidFill>
